--- a/最好的福氣.pptx
+++ b/最好的福氣.pptx
@@ -5,12 +5,19 @@
     <p:sldMasterId id="2147483696" r:id="rId1"/>
   </p:sldMasterIdLst>
   <p:sldIdLst>
-    <p:sldId id="256" r:id="rId2"/>
-    <p:sldId id="258" r:id="rId3"/>
-    <p:sldId id="259" r:id="rId4"/>
-    <p:sldId id="260" r:id="rId5"/>
-    <p:sldId id="261" r:id="rId6"/>
-    <p:sldId id="262" r:id="rId7"/>
+    <p:sldId id="391" r:id="rId2"/>
+    <p:sldId id="392" r:id="rId3"/>
+    <p:sldId id="393" r:id="rId4"/>
+    <p:sldId id="394" r:id="rId5"/>
+    <p:sldId id="395" r:id="rId6"/>
+    <p:sldId id="396" r:id="rId7"/>
+    <p:sldId id="397" r:id="rId8"/>
+    <p:sldId id="398" r:id="rId9"/>
+    <p:sldId id="399" r:id="rId10"/>
+    <p:sldId id="400" r:id="rId11"/>
+    <p:sldId id="401" r:id="rId12"/>
+    <p:sldId id="402" r:id="rId13"/>
+    <p:sldId id="403" r:id="rId14"/>
   </p:sldIdLst>
   <p:sldSz cx="12192000" cy="6858000"/>
   <p:notesSz cx="6858000" cy="9144000"/>
@@ -166,7 +173,7 @@
           <a:lstStyle/>
           <a:p>
             <a:r>
-              <a:rPr lang="en-US" altLang="zh-TW" smtClean="0"/>
+              <a:rPr lang="en-US" altLang="zh-TW"/>
               <a:t>Click to edit Master title style</a:t>
             </a:r>
             <a:endParaRPr lang="zh-TW" altLang="en-US"/>
@@ -285,7 +292,7 @@
           </a:lstStyle>
           <a:p>
             <a:r>
-              <a:rPr lang="en-US" altLang="zh-TW" smtClean="0"/>
+              <a:rPr lang="en-US" altLang="zh-TW"/>
               <a:t>Click to edit Master subtitle style</a:t>
             </a:r>
             <a:endParaRPr lang="zh-TW" altLang="en-US"/>
@@ -309,7 +316,7 @@
           <a:p>
             <a:fld id="{5793261C-4443-4389-B2B3-1B7E18A2DA80}" type="datetimeFigureOut">
               <a:rPr lang="zh-TW" altLang="en-US" smtClean="0"/>
-              <a:t>2020/5/16</a:t>
+              <a:t>2025/7/19</a:t>
             </a:fld>
             <a:endParaRPr lang="zh-TW" altLang="en-US"/>
           </a:p>
@@ -403,7 +410,7 @@
           <a:lstStyle/>
           <a:p>
             <a:r>
-              <a:rPr lang="en-US" altLang="zh-TW" smtClean="0"/>
+              <a:rPr lang="en-US" altLang="zh-TW"/>
               <a:t>Click to edit Master title style</a:t>
             </a:r>
             <a:endParaRPr lang="zh-TW" altLang="en-US"/>
@@ -427,35 +434,35 @@
           <a:p>
             <a:pPr lvl="0"/>
             <a:r>
-              <a:rPr lang="en-US" altLang="zh-TW" smtClean="0"/>
+              <a:rPr lang="en-US" altLang="zh-TW"/>
               <a:t>Edit Master text styles</a:t>
             </a:r>
           </a:p>
           <a:p>
             <a:pPr lvl="1"/>
             <a:r>
-              <a:rPr lang="en-US" altLang="zh-TW" smtClean="0"/>
+              <a:rPr lang="en-US" altLang="zh-TW"/>
               <a:t>Second level</a:t>
             </a:r>
           </a:p>
           <a:p>
             <a:pPr lvl="2"/>
             <a:r>
-              <a:rPr lang="en-US" altLang="zh-TW" smtClean="0"/>
+              <a:rPr lang="en-US" altLang="zh-TW"/>
               <a:t>Third level</a:t>
             </a:r>
           </a:p>
           <a:p>
             <a:pPr lvl="3"/>
             <a:r>
-              <a:rPr lang="en-US" altLang="zh-TW" smtClean="0"/>
+              <a:rPr lang="en-US" altLang="zh-TW"/>
               <a:t>Fourth level</a:t>
             </a:r>
           </a:p>
           <a:p>
             <a:pPr lvl="4"/>
             <a:r>
-              <a:rPr lang="en-US" altLang="zh-TW" smtClean="0"/>
+              <a:rPr lang="en-US" altLang="zh-TW"/>
               <a:t>Fifth level</a:t>
             </a:r>
             <a:endParaRPr lang="zh-TW" altLang="en-US"/>
@@ -479,7 +486,7 @@
           <a:p>
             <a:fld id="{5793261C-4443-4389-B2B3-1B7E18A2DA80}" type="datetimeFigureOut">
               <a:rPr lang="zh-TW" altLang="en-US" smtClean="0"/>
-              <a:t>2020/5/16</a:t>
+              <a:t>2025/7/19</a:t>
             </a:fld>
             <a:endParaRPr lang="zh-TW" altLang="en-US"/>
           </a:p>
@@ -578,7 +585,7 @@
           <a:lstStyle/>
           <a:p>
             <a:r>
-              <a:rPr lang="en-US" altLang="zh-TW" smtClean="0"/>
+              <a:rPr lang="en-US" altLang="zh-TW"/>
               <a:t>Click to edit Master title style</a:t>
             </a:r>
             <a:endParaRPr lang="zh-TW" altLang="en-US"/>
@@ -607,35 +614,35 @@
           <a:p>
             <a:pPr lvl="0"/>
             <a:r>
-              <a:rPr lang="en-US" altLang="zh-TW" smtClean="0"/>
+              <a:rPr lang="en-US" altLang="zh-TW"/>
               <a:t>Edit Master text styles</a:t>
             </a:r>
           </a:p>
           <a:p>
             <a:pPr lvl="1"/>
             <a:r>
-              <a:rPr lang="en-US" altLang="zh-TW" smtClean="0"/>
+              <a:rPr lang="en-US" altLang="zh-TW"/>
               <a:t>Second level</a:t>
             </a:r>
           </a:p>
           <a:p>
             <a:pPr lvl="2"/>
             <a:r>
-              <a:rPr lang="en-US" altLang="zh-TW" smtClean="0"/>
+              <a:rPr lang="en-US" altLang="zh-TW"/>
               <a:t>Third level</a:t>
             </a:r>
           </a:p>
           <a:p>
             <a:pPr lvl="3"/>
             <a:r>
-              <a:rPr lang="en-US" altLang="zh-TW" smtClean="0"/>
+              <a:rPr lang="en-US" altLang="zh-TW"/>
               <a:t>Fourth level</a:t>
             </a:r>
           </a:p>
           <a:p>
             <a:pPr lvl="4"/>
             <a:r>
-              <a:rPr lang="en-US" altLang="zh-TW" smtClean="0"/>
+              <a:rPr lang="en-US" altLang="zh-TW"/>
               <a:t>Fifth level</a:t>
             </a:r>
             <a:endParaRPr lang="zh-TW" altLang="en-US"/>
@@ -659,7 +666,7 @@
           <a:p>
             <a:fld id="{5793261C-4443-4389-B2B3-1B7E18A2DA80}" type="datetimeFigureOut">
               <a:rPr lang="zh-TW" altLang="en-US" smtClean="0"/>
-              <a:t>2020/5/16</a:t>
+              <a:t>2025/7/19</a:t>
             </a:fld>
             <a:endParaRPr lang="zh-TW" altLang="en-US"/>
           </a:p>
@@ -753,7 +760,7 @@
           <a:lstStyle/>
           <a:p>
             <a:r>
-              <a:rPr lang="en-US" altLang="zh-TW" smtClean="0"/>
+              <a:rPr lang="en-US" altLang="zh-TW"/>
               <a:t>Click to edit Master title style</a:t>
             </a:r>
             <a:endParaRPr lang="zh-TW" altLang="en-US"/>
@@ -777,35 +784,35 @@
           <a:p>
             <a:pPr lvl="0"/>
             <a:r>
-              <a:rPr lang="en-US" altLang="zh-TW" smtClean="0"/>
+              <a:rPr lang="en-US" altLang="zh-TW"/>
               <a:t>Edit Master text styles</a:t>
             </a:r>
           </a:p>
           <a:p>
             <a:pPr lvl="1"/>
             <a:r>
-              <a:rPr lang="en-US" altLang="zh-TW" smtClean="0"/>
+              <a:rPr lang="en-US" altLang="zh-TW"/>
               <a:t>Second level</a:t>
             </a:r>
           </a:p>
           <a:p>
             <a:pPr lvl="2"/>
             <a:r>
-              <a:rPr lang="en-US" altLang="zh-TW" smtClean="0"/>
+              <a:rPr lang="en-US" altLang="zh-TW"/>
               <a:t>Third level</a:t>
             </a:r>
           </a:p>
           <a:p>
             <a:pPr lvl="3"/>
             <a:r>
-              <a:rPr lang="en-US" altLang="zh-TW" smtClean="0"/>
+              <a:rPr lang="en-US" altLang="zh-TW"/>
               <a:t>Fourth level</a:t>
             </a:r>
           </a:p>
           <a:p>
             <a:pPr lvl="4"/>
             <a:r>
-              <a:rPr lang="en-US" altLang="zh-TW" smtClean="0"/>
+              <a:rPr lang="en-US" altLang="zh-TW"/>
               <a:t>Fifth level</a:t>
             </a:r>
             <a:endParaRPr lang="zh-TW" altLang="en-US"/>
@@ -829,7 +836,7 @@
           <a:p>
             <a:fld id="{5793261C-4443-4389-B2B3-1B7E18A2DA80}" type="datetimeFigureOut">
               <a:rPr lang="zh-TW" altLang="en-US" smtClean="0"/>
-              <a:t>2020/5/16</a:t>
+              <a:t>2025/7/19</a:t>
             </a:fld>
             <a:endParaRPr lang="zh-TW" altLang="en-US"/>
           </a:p>
@@ -932,7 +939,7 @@
           </a:lstStyle>
           <a:p>
             <a:r>
-              <a:rPr lang="en-US" altLang="zh-TW" smtClean="0"/>
+              <a:rPr lang="en-US" altLang="zh-TW"/>
               <a:t>Click to edit Master title style</a:t>
             </a:r>
             <a:endParaRPr lang="zh-TW" altLang="en-US"/>
@@ -1052,7 +1059,7 @@
           <a:p>
             <a:pPr lvl="0"/>
             <a:r>
-              <a:rPr lang="en-US" altLang="zh-TW" smtClean="0"/>
+              <a:rPr lang="en-US" altLang="zh-TW"/>
               <a:t>Edit Master text styles</a:t>
             </a:r>
           </a:p>
@@ -1075,7 +1082,7 @@
           <a:p>
             <a:fld id="{5793261C-4443-4389-B2B3-1B7E18A2DA80}" type="datetimeFigureOut">
               <a:rPr lang="zh-TW" altLang="en-US" smtClean="0"/>
-              <a:t>2020/5/16</a:t>
+              <a:t>2025/7/19</a:t>
             </a:fld>
             <a:endParaRPr lang="zh-TW" altLang="en-US"/>
           </a:p>
@@ -1169,7 +1176,7 @@
           <a:lstStyle/>
           <a:p>
             <a:r>
-              <a:rPr lang="en-US" altLang="zh-TW" smtClean="0"/>
+              <a:rPr lang="en-US" altLang="zh-TW"/>
               <a:t>Click to edit Master title style</a:t>
             </a:r>
             <a:endParaRPr lang="zh-TW" altLang="en-US"/>
@@ -1226,35 +1233,35 @@
           <a:p>
             <a:pPr lvl="0"/>
             <a:r>
-              <a:rPr lang="en-US" altLang="zh-TW" smtClean="0"/>
+              <a:rPr lang="en-US" altLang="zh-TW"/>
               <a:t>Edit Master text styles</a:t>
             </a:r>
           </a:p>
           <a:p>
             <a:pPr lvl="1"/>
             <a:r>
-              <a:rPr lang="en-US" altLang="zh-TW" smtClean="0"/>
+              <a:rPr lang="en-US" altLang="zh-TW"/>
               <a:t>Second level</a:t>
             </a:r>
           </a:p>
           <a:p>
             <a:pPr lvl="2"/>
             <a:r>
-              <a:rPr lang="en-US" altLang="zh-TW" smtClean="0"/>
+              <a:rPr lang="en-US" altLang="zh-TW"/>
               <a:t>Third level</a:t>
             </a:r>
           </a:p>
           <a:p>
             <a:pPr lvl="3"/>
             <a:r>
-              <a:rPr lang="en-US" altLang="zh-TW" smtClean="0"/>
+              <a:rPr lang="en-US" altLang="zh-TW"/>
               <a:t>Fourth level</a:t>
             </a:r>
           </a:p>
           <a:p>
             <a:pPr lvl="4"/>
             <a:r>
-              <a:rPr lang="en-US" altLang="zh-TW" smtClean="0"/>
+              <a:rPr lang="en-US" altLang="zh-TW"/>
               <a:t>Fifth level</a:t>
             </a:r>
             <a:endParaRPr lang="zh-TW" altLang="en-US"/>
@@ -1311,35 +1318,35 @@
           <a:p>
             <a:pPr lvl="0"/>
             <a:r>
-              <a:rPr lang="en-US" altLang="zh-TW" smtClean="0"/>
+              <a:rPr lang="en-US" altLang="zh-TW"/>
               <a:t>Edit Master text styles</a:t>
             </a:r>
           </a:p>
           <a:p>
             <a:pPr lvl="1"/>
             <a:r>
-              <a:rPr lang="en-US" altLang="zh-TW" smtClean="0"/>
+              <a:rPr lang="en-US" altLang="zh-TW"/>
               <a:t>Second level</a:t>
             </a:r>
           </a:p>
           <a:p>
             <a:pPr lvl="2"/>
             <a:r>
-              <a:rPr lang="en-US" altLang="zh-TW" smtClean="0"/>
+              <a:rPr lang="en-US" altLang="zh-TW"/>
               <a:t>Third level</a:t>
             </a:r>
           </a:p>
           <a:p>
             <a:pPr lvl="3"/>
             <a:r>
-              <a:rPr lang="en-US" altLang="zh-TW" smtClean="0"/>
+              <a:rPr lang="en-US" altLang="zh-TW"/>
               <a:t>Fourth level</a:t>
             </a:r>
           </a:p>
           <a:p>
             <a:pPr lvl="4"/>
             <a:r>
-              <a:rPr lang="en-US" altLang="zh-TW" smtClean="0"/>
+              <a:rPr lang="en-US" altLang="zh-TW"/>
               <a:t>Fifth level</a:t>
             </a:r>
             <a:endParaRPr lang="zh-TW" altLang="en-US"/>
@@ -1363,7 +1370,7 @@
           <a:p>
             <a:fld id="{5793261C-4443-4389-B2B3-1B7E18A2DA80}" type="datetimeFigureOut">
               <a:rPr lang="zh-TW" altLang="en-US" smtClean="0"/>
-              <a:t>2020/5/16</a:t>
+              <a:t>2025/7/19</a:t>
             </a:fld>
             <a:endParaRPr lang="zh-TW" altLang="en-US"/>
           </a:p>
@@ -1461,7 +1468,7 @@
           </a:lstStyle>
           <a:p>
             <a:r>
-              <a:rPr lang="en-US" altLang="zh-TW" smtClean="0"/>
+              <a:rPr lang="en-US" altLang="zh-TW"/>
               <a:t>Click to edit Master title style</a:t>
             </a:r>
             <a:endParaRPr lang="zh-TW" altLang="en-US"/>
@@ -1527,7 +1534,7 @@
           <a:p>
             <a:pPr lvl="0"/>
             <a:r>
-              <a:rPr lang="en-US" altLang="zh-TW" smtClean="0"/>
+              <a:rPr lang="en-US" altLang="zh-TW"/>
               <a:t>Edit Master text styles</a:t>
             </a:r>
           </a:p>
@@ -1583,35 +1590,35 @@
           <a:p>
             <a:pPr lvl="0"/>
             <a:r>
-              <a:rPr lang="en-US" altLang="zh-TW" smtClean="0"/>
+              <a:rPr lang="en-US" altLang="zh-TW"/>
               <a:t>Edit Master text styles</a:t>
             </a:r>
           </a:p>
           <a:p>
             <a:pPr lvl="1"/>
             <a:r>
-              <a:rPr lang="en-US" altLang="zh-TW" smtClean="0"/>
+              <a:rPr lang="en-US" altLang="zh-TW"/>
               <a:t>Second level</a:t>
             </a:r>
           </a:p>
           <a:p>
             <a:pPr lvl="2"/>
             <a:r>
-              <a:rPr lang="en-US" altLang="zh-TW" smtClean="0"/>
+              <a:rPr lang="en-US" altLang="zh-TW"/>
               <a:t>Third level</a:t>
             </a:r>
           </a:p>
           <a:p>
             <a:pPr lvl="3"/>
             <a:r>
-              <a:rPr lang="en-US" altLang="zh-TW" smtClean="0"/>
+              <a:rPr lang="en-US" altLang="zh-TW"/>
               <a:t>Fourth level</a:t>
             </a:r>
           </a:p>
           <a:p>
             <a:pPr lvl="4"/>
             <a:r>
-              <a:rPr lang="en-US" altLang="zh-TW" smtClean="0"/>
+              <a:rPr lang="en-US" altLang="zh-TW"/>
               <a:t>Fifth level</a:t>
             </a:r>
             <a:endParaRPr lang="zh-TW" altLang="en-US"/>
@@ -1677,7 +1684,7 @@
           <a:p>
             <a:pPr lvl="0"/>
             <a:r>
-              <a:rPr lang="en-US" altLang="zh-TW" smtClean="0"/>
+              <a:rPr lang="en-US" altLang="zh-TW"/>
               <a:t>Edit Master text styles</a:t>
             </a:r>
           </a:p>
@@ -1733,35 +1740,35 @@
           <a:p>
             <a:pPr lvl="0"/>
             <a:r>
-              <a:rPr lang="en-US" altLang="zh-TW" smtClean="0"/>
+              <a:rPr lang="en-US" altLang="zh-TW"/>
               <a:t>Edit Master text styles</a:t>
             </a:r>
           </a:p>
           <a:p>
             <a:pPr lvl="1"/>
             <a:r>
-              <a:rPr lang="en-US" altLang="zh-TW" smtClean="0"/>
+              <a:rPr lang="en-US" altLang="zh-TW"/>
               <a:t>Second level</a:t>
             </a:r>
           </a:p>
           <a:p>
             <a:pPr lvl="2"/>
             <a:r>
-              <a:rPr lang="en-US" altLang="zh-TW" smtClean="0"/>
+              <a:rPr lang="en-US" altLang="zh-TW"/>
               <a:t>Third level</a:t>
             </a:r>
           </a:p>
           <a:p>
             <a:pPr lvl="3"/>
             <a:r>
-              <a:rPr lang="en-US" altLang="zh-TW" smtClean="0"/>
+              <a:rPr lang="en-US" altLang="zh-TW"/>
               <a:t>Fourth level</a:t>
             </a:r>
           </a:p>
           <a:p>
             <a:pPr lvl="4"/>
             <a:r>
-              <a:rPr lang="en-US" altLang="zh-TW" smtClean="0"/>
+              <a:rPr lang="en-US" altLang="zh-TW"/>
               <a:t>Fifth level</a:t>
             </a:r>
             <a:endParaRPr lang="zh-TW" altLang="en-US"/>
@@ -1785,7 +1792,7 @@
           <a:p>
             <a:fld id="{5793261C-4443-4389-B2B3-1B7E18A2DA80}" type="datetimeFigureOut">
               <a:rPr lang="zh-TW" altLang="en-US" smtClean="0"/>
-              <a:t>2020/5/16</a:t>
+              <a:t>2025/7/19</a:t>
             </a:fld>
             <a:endParaRPr lang="zh-TW" altLang="en-US"/>
           </a:p>
@@ -1879,7 +1886,7 @@
           <a:lstStyle/>
           <a:p>
             <a:r>
-              <a:rPr lang="en-US" altLang="zh-TW" smtClean="0"/>
+              <a:rPr lang="en-US" altLang="zh-TW"/>
               <a:t>Click to edit Master title style</a:t>
             </a:r>
             <a:endParaRPr lang="zh-TW" altLang="en-US"/>
@@ -1903,7 +1910,7 @@
           <a:p>
             <a:fld id="{5793261C-4443-4389-B2B3-1B7E18A2DA80}" type="datetimeFigureOut">
               <a:rPr lang="zh-TW" altLang="en-US" smtClean="0"/>
-              <a:t>2020/5/16</a:t>
+              <a:t>2025/7/19</a:t>
             </a:fld>
             <a:endParaRPr lang="zh-TW" altLang="en-US"/>
           </a:p>
@@ -1998,7 +2005,7 @@
           <a:p>
             <a:fld id="{5793261C-4443-4389-B2B3-1B7E18A2DA80}" type="datetimeFigureOut">
               <a:rPr lang="zh-TW" altLang="en-US" smtClean="0"/>
-              <a:t>2020/5/16</a:t>
+              <a:t>2025/7/19</a:t>
             </a:fld>
             <a:endParaRPr lang="zh-TW" altLang="en-US"/>
           </a:p>
@@ -2101,7 +2108,7 @@
           </a:lstStyle>
           <a:p>
             <a:r>
-              <a:rPr lang="en-US" altLang="zh-TW" smtClean="0"/>
+              <a:rPr lang="en-US" altLang="zh-TW"/>
               <a:t>Click to edit Master title style</a:t>
             </a:r>
             <a:endParaRPr lang="zh-TW" altLang="en-US"/>
@@ -2158,35 +2165,35 @@
           <a:p>
             <a:pPr lvl="0"/>
             <a:r>
-              <a:rPr lang="en-US" altLang="zh-TW" smtClean="0"/>
+              <a:rPr lang="en-US" altLang="zh-TW"/>
               <a:t>Edit Master text styles</a:t>
             </a:r>
           </a:p>
           <a:p>
             <a:pPr lvl="1"/>
             <a:r>
-              <a:rPr lang="en-US" altLang="zh-TW" smtClean="0"/>
+              <a:rPr lang="en-US" altLang="zh-TW"/>
               <a:t>Second level</a:t>
             </a:r>
           </a:p>
           <a:p>
             <a:pPr lvl="2"/>
             <a:r>
-              <a:rPr lang="en-US" altLang="zh-TW" smtClean="0"/>
+              <a:rPr lang="en-US" altLang="zh-TW"/>
               <a:t>Third level</a:t>
             </a:r>
           </a:p>
           <a:p>
             <a:pPr lvl="3"/>
             <a:r>
-              <a:rPr lang="en-US" altLang="zh-TW" smtClean="0"/>
+              <a:rPr lang="en-US" altLang="zh-TW"/>
               <a:t>Fourth level</a:t>
             </a:r>
           </a:p>
           <a:p>
             <a:pPr lvl="4"/>
             <a:r>
-              <a:rPr lang="en-US" altLang="zh-TW" smtClean="0"/>
+              <a:rPr lang="en-US" altLang="zh-TW"/>
               <a:t>Fifth level</a:t>
             </a:r>
             <a:endParaRPr lang="zh-TW" altLang="en-US"/>
@@ -2252,7 +2259,7 @@
           <a:p>
             <a:pPr lvl="0"/>
             <a:r>
-              <a:rPr lang="en-US" altLang="zh-TW" smtClean="0"/>
+              <a:rPr lang="en-US" altLang="zh-TW"/>
               <a:t>Edit Master text styles</a:t>
             </a:r>
           </a:p>
@@ -2275,7 +2282,7 @@
           <a:p>
             <a:fld id="{5793261C-4443-4389-B2B3-1B7E18A2DA80}" type="datetimeFigureOut">
               <a:rPr lang="zh-TW" altLang="en-US" smtClean="0"/>
-              <a:t>2020/5/16</a:t>
+              <a:t>2025/7/19</a:t>
             </a:fld>
             <a:endParaRPr lang="zh-TW" altLang="en-US"/>
           </a:p>
@@ -2378,7 +2385,7 @@
           </a:lstStyle>
           <a:p>
             <a:r>
-              <a:rPr lang="en-US" altLang="zh-TW" smtClean="0"/>
+              <a:rPr lang="en-US" altLang="zh-TW"/>
               <a:t>Click to edit Master title style</a:t>
             </a:r>
             <a:endParaRPr lang="zh-TW" altLang="en-US"/>
@@ -2443,7 +2450,7 @@
           </a:lstStyle>
           <a:p>
             <a:r>
-              <a:rPr lang="en-US" altLang="zh-TW" smtClean="0"/>
+              <a:rPr lang="en-US" altLang="zh-TW"/>
               <a:t>Click icon to add picture</a:t>
             </a:r>
             <a:endParaRPr lang="zh-TW" altLang="en-US"/>
@@ -2509,7 +2516,7 @@
           <a:p>
             <a:pPr lvl="0"/>
             <a:r>
-              <a:rPr lang="en-US" altLang="zh-TW" smtClean="0"/>
+              <a:rPr lang="en-US" altLang="zh-TW"/>
               <a:t>Edit Master text styles</a:t>
             </a:r>
           </a:p>
@@ -2532,7 +2539,7 @@
           <a:p>
             <a:fld id="{5793261C-4443-4389-B2B3-1B7E18A2DA80}" type="datetimeFigureOut">
               <a:rPr lang="zh-TW" altLang="en-US" smtClean="0"/>
-              <a:t>2020/5/16</a:t>
+              <a:t>2025/7/19</a:t>
             </a:fld>
             <a:endParaRPr lang="zh-TW" altLang="en-US"/>
           </a:p>
@@ -2646,10 +2653,9 @@
           <a:lstStyle/>
           <a:p>
             <a:r>
-              <a:rPr lang="zh-TW" altLang="en-US" smtClean="0"/>
+              <a:rPr lang="zh-TW" altLang="en-US"/>
               <a:t>按一下以編輯母片標題樣式</a:t>
             </a:r>
-            <a:endParaRPr lang="zh-TW" altLang="en-US"/>
           </a:p>
         </p:txBody>
       </p:sp>
@@ -2680,38 +2686,37 @@
           <a:p>
             <a:pPr lvl="0"/>
             <a:r>
-              <a:rPr lang="zh-TW" altLang="en-US" smtClean="0"/>
+              <a:rPr lang="zh-TW" altLang="en-US"/>
               <a:t>按一下以編輯母片文字樣式</a:t>
             </a:r>
           </a:p>
           <a:p>
             <a:pPr lvl="1"/>
             <a:r>
-              <a:rPr lang="zh-TW" altLang="en-US" smtClean="0"/>
+              <a:rPr lang="zh-TW" altLang="en-US"/>
               <a:t>第二層</a:t>
             </a:r>
           </a:p>
           <a:p>
             <a:pPr lvl="2"/>
             <a:r>
-              <a:rPr lang="zh-TW" altLang="en-US" smtClean="0"/>
+              <a:rPr lang="zh-TW" altLang="en-US"/>
               <a:t>第三層</a:t>
             </a:r>
           </a:p>
           <a:p>
             <a:pPr lvl="3"/>
             <a:r>
-              <a:rPr lang="zh-TW" altLang="en-US" smtClean="0"/>
+              <a:rPr lang="zh-TW" altLang="en-US"/>
               <a:t>第四層</a:t>
             </a:r>
           </a:p>
           <a:p>
             <a:pPr lvl="4"/>
             <a:r>
-              <a:rPr lang="zh-TW" altLang="en-US" smtClean="0"/>
+              <a:rPr lang="zh-TW" altLang="en-US"/>
               <a:t>第五層</a:t>
             </a:r>
-            <a:endParaRPr lang="zh-TW" altLang="en-US"/>
           </a:p>
         </p:txBody>
       </p:sp>
@@ -2750,7 +2755,7 @@
           <a:p>
             <a:fld id="{5793261C-4443-4389-B2B3-1B7E18A2DA80}" type="datetimeFigureOut">
               <a:rPr lang="zh-TW" altLang="en-US" smtClean="0"/>
-              <a:t>2020/5/16</a:t>
+              <a:t>2025/7/19</a:t>
             </a:fld>
             <a:endParaRPr lang="zh-TW" altLang="en-US"/>
           </a:p>
@@ -3113,7 +3118,13 @@
   <p:cSld>
     <p:spTree>
       <p:nvGrpSpPr>
-        <p:cNvPr id="1" name=""/>
+        <p:cNvPr id="1" name="">
+          <a:extLst>
+            <a:ext uri="{FF2B5EF4-FFF2-40B4-BE49-F238E27FC236}">
+              <a16:creationId xmlns:a16="http://schemas.microsoft.com/office/drawing/2014/main" id="{5F20F3D7-EDDF-CE30-9060-314A88E3730B}"/>
+            </a:ext>
+          </a:extLst>
+        </p:cNvPr>
         <p:cNvGrpSpPr/>
         <p:nvPr/>
       </p:nvGrpSpPr>
@@ -3127,7 +3138,13 @@
       </p:grpSpPr>
       <p:sp>
         <p:nvSpPr>
-          <p:cNvPr id="4" name="標題 3"/>
+          <p:cNvPr id="4" name="標題 3">
+            <a:extLst>
+              <a:ext uri="{FF2B5EF4-FFF2-40B4-BE49-F238E27FC236}">
+                <a16:creationId xmlns:a16="http://schemas.microsoft.com/office/drawing/2014/main" id="{CD6A41DD-B5E6-D530-EC0F-85726817D119}"/>
+              </a:ext>
+            </a:extLst>
+          </p:cNvPr>
           <p:cNvSpPr>
             <a:spLocks noGrp="1"/>
           </p:cNvSpPr>
@@ -3135,26 +3152,256 @@
             <p:ph type="title"/>
           </p:nvPr>
         </p:nvSpPr>
-        <p:spPr/>
+        <p:spPr>
+          <a:xfrm>
+            <a:off x="0" y="2660915"/>
+            <a:ext cx="12192000" cy="1143000"/>
+          </a:xfrm>
+        </p:spPr>
         <p:txBody>
           <a:bodyPr>
+            <a:noAutofit/>
+          </a:bodyPr>
+          <a:lstStyle/>
+          <a:p>
+            <a:r>
+              <a:rPr lang="zh-TW" altLang="en-US" sz="7200" b="1" i="1" dirty="0">
+                <a:solidFill>
+                  <a:srgbClr val="000066"/>
+                </a:solidFill>
+                <a:effectLst>
+                  <a:outerShdw blurRad="38100" dist="38100" dir="2700000" algn="tl">
+                    <a:srgbClr val="000000">
+                      <a:alpha val="43137"/>
+                    </a:srgbClr>
+                  </a:outerShdw>
+                </a:effectLst>
+                <a:latin typeface="微軟正黑體" pitchFamily="34" charset="-120"/>
+                <a:ea typeface="微軟正黑體" pitchFamily="34" charset="-120"/>
+              </a:rPr>
+              <a:t>最好的福氣</a:t>
+            </a:r>
+          </a:p>
+        </p:txBody>
+      </p:sp>
+    </p:spTree>
+    <p:extLst>
+      <p:ext uri="{BB962C8B-B14F-4D97-AF65-F5344CB8AC3E}">
+        <p14:creationId xmlns:p14="http://schemas.microsoft.com/office/powerpoint/2010/main" val="388492399"/>
+      </p:ext>
+    </p:extLst>
+  </p:cSld>
+  <p:clrMapOvr>
+    <a:masterClrMapping/>
+  </p:clrMapOvr>
+</p:sld>
+</file>
+
+<file path=ppt/slides/slide10.xml><?xml version="1.0" encoding="utf-8"?>
+<p:sld xmlns:a="http://schemas.openxmlformats.org/drawingml/2006/main" xmlns:r="http://schemas.openxmlformats.org/officeDocument/2006/relationships" xmlns:p="http://schemas.openxmlformats.org/presentationml/2006/main">
+  <p:cSld>
+    <p:spTree>
+      <p:nvGrpSpPr>
+        <p:cNvPr id="1" name="">
+          <a:extLst>
+            <a:ext uri="{FF2B5EF4-FFF2-40B4-BE49-F238E27FC236}">
+              <a16:creationId xmlns:a16="http://schemas.microsoft.com/office/drawing/2014/main" id="{A4D50907-F44B-CB2D-A80D-02EB0E3FB405}"/>
+            </a:ext>
+          </a:extLst>
+        </p:cNvPr>
+        <p:cNvGrpSpPr/>
+        <p:nvPr/>
+      </p:nvGrpSpPr>
+      <p:grpSpPr>
+        <a:xfrm>
+          <a:off x="0" y="0"/>
+          <a:ext cx="0" cy="0"/>
+          <a:chOff x="0" y="0"/>
+          <a:chExt cx="0" cy="0"/>
+        </a:xfrm>
+      </p:grpSpPr>
+      <p:sp>
+        <p:nvSpPr>
+          <p:cNvPr id="5" name="內容版面配置區 4">
+            <a:extLst>
+              <a:ext uri="{FF2B5EF4-FFF2-40B4-BE49-F238E27FC236}">
+                <a16:creationId xmlns:a16="http://schemas.microsoft.com/office/drawing/2014/main" id="{ED5533DB-5012-D4A2-F893-76580C40B318}"/>
+              </a:ext>
+            </a:extLst>
+          </p:cNvPr>
+          <p:cNvSpPr>
+            <a:spLocks noGrp="1"/>
+          </p:cNvSpPr>
+          <p:nvPr>
+            <p:ph idx="1"/>
+          </p:nvPr>
+        </p:nvSpPr>
+        <p:spPr>
+          <a:xfrm>
+            <a:off x="0" y="2084851"/>
+            <a:ext cx="12192000" cy="2404863"/>
+          </a:xfrm>
+        </p:spPr>
+        <p:txBody>
+          <a:bodyPr anchor="ctr">
             <a:normAutofit/>
           </a:bodyPr>
           <a:lstStyle/>
           <a:p>
-            <a:r>
-              <a:rPr lang="zh-TW" altLang="en-US" sz="4800" b="1" dirty="0">
+            <a:pPr algn="ctr">
+              <a:buNone/>
+            </a:pPr>
+            <a:r>
+              <a:rPr lang="zh-TW" altLang="en-US" sz="6400" b="1" dirty="0">
+                <a:solidFill>
+                  <a:srgbClr val="000066"/>
+                </a:solidFill>
+                <a:latin typeface="微軟正黑體" pitchFamily="34" charset="-120"/>
+                <a:ea typeface="微軟正黑體" pitchFamily="34" charset="-120"/>
+              </a:rPr>
+              <a:t>讓我抓緊祢熱暖的手臂</a:t>
+            </a:r>
+          </a:p>
+          <a:p>
+            <a:pPr algn="ctr">
+              <a:buNone/>
+            </a:pPr>
+            <a:r>
+              <a:rPr lang="zh-TW" altLang="en-US" sz="6400" b="1" dirty="0">
+                <a:solidFill>
+                  <a:srgbClr val="000066"/>
+                </a:solidFill>
+                <a:latin typeface="微軟正黑體" pitchFamily="34" charset="-120"/>
+                <a:ea typeface="微軟正黑體" pitchFamily="34" charset="-120"/>
+              </a:rPr>
+              <a:t>攜著我再振翅高飛</a:t>
+            </a:r>
+          </a:p>
+        </p:txBody>
+      </p:sp>
+      <p:sp>
+        <p:nvSpPr>
+          <p:cNvPr id="3" name="TextBox 2">
+            <a:extLst>
+              <a:ext uri="{FF2B5EF4-FFF2-40B4-BE49-F238E27FC236}">
+                <a16:creationId xmlns:a16="http://schemas.microsoft.com/office/drawing/2014/main" id="{3E25302F-9F44-D562-3512-3995EECF4900}"/>
+              </a:ext>
+            </a:extLst>
+          </p:cNvPr>
+          <p:cNvSpPr txBox="1"/>
+          <p:nvPr/>
+        </p:nvSpPr>
+        <p:spPr>
+          <a:xfrm>
+            <a:off x="0" y="5157193"/>
+            <a:ext cx="12192000" cy="584775"/>
+          </a:xfrm>
+          <a:prstGeom prst="rect">
+            <a:avLst/>
+          </a:prstGeom>
+          <a:noFill/>
+        </p:spPr>
+        <p:txBody>
+          <a:bodyPr wrap="square" rtlCol="0">
+            <a:spAutoFit/>
+          </a:bodyPr>
+          <a:lstStyle/>
+          <a:p>
+            <a:pPr algn="ctr"/>
+            <a:r>
+              <a:rPr lang="en-US" sz="3200" b="1" dirty="0">
+                <a:solidFill>
+                  <a:srgbClr val="000066"/>
+                </a:solidFill>
                 <a:latin typeface="Microsoft JhengHei" panose="020B0604030504040204" pitchFamily="34" charset="-120"/>
                 <a:ea typeface="Microsoft JhengHei" panose="020B0604030504040204" pitchFamily="34" charset="-120"/>
               </a:rPr>
-              <a:t>最好的福氣</a:t>
-            </a:r>
-          </a:p>
-        </p:txBody>
-      </p:sp>
-      <p:sp>
-        <p:nvSpPr>
-          <p:cNvPr id="5" name="內容版面配置區 4"/>
+              <a:t>( </a:t>
+            </a:r>
+            <a:r>
+              <a:rPr lang="zh-CN" altLang="en-US" sz="3200" b="1" dirty="0">
+                <a:solidFill>
+                  <a:srgbClr val="000066"/>
+                </a:solidFill>
+                <a:latin typeface="Microsoft JhengHei" panose="020B0604030504040204" pitchFamily="34" charset="-120"/>
+                <a:ea typeface="Microsoft JhengHei" panose="020B0604030504040204" pitchFamily="34" charset="-120"/>
+              </a:rPr>
+              <a:t>副歌</a:t>
+            </a:r>
+            <a:r>
+              <a:rPr lang="en-US" altLang="zh-CN" sz="3200" b="1" dirty="0">
+                <a:solidFill>
+                  <a:srgbClr val="000066"/>
+                </a:solidFill>
+                <a:latin typeface="Microsoft JhengHei" panose="020B0604030504040204" pitchFamily="34" charset="-120"/>
+                <a:ea typeface="Microsoft JhengHei" panose="020B0604030504040204" pitchFamily="34" charset="-120"/>
+              </a:rPr>
+              <a:t> 2</a:t>
+            </a:r>
+            <a:r>
+              <a:rPr lang="en-US" sz="3200" b="1" dirty="0">
+                <a:solidFill>
+                  <a:srgbClr val="000066"/>
+                </a:solidFill>
+                <a:latin typeface="Microsoft JhengHei" panose="020B0604030504040204" pitchFamily="34" charset="-120"/>
+                <a:ea typeface="Microsoft JhengHei" panose="020B0604030504040204" pitchFamily="34" charset="-120"/>
+              </a:rPr>
+              <a:t> )</a:t>
+            </a:r>
+            <a:endParaRPr lang="vi-VN" sz="3200" b="1" dirty="0">
+              <a:solidFill>
+                <a:srgbClr val="000066"/>
+              </a:solidFill>
+              <a:ea typeface="Microsoft JhengHei" panose="020B0604030504040204" pitchFamily="34" charset="-120"/>
+            </a:endParaRPr>
+          </a:p>
+        </p:txBody>
+      </p:sp>
+    </p:spTree>
+    <p:extLst>
+      <p:ext uri="{BB962C8B-B14F-4D97-AF65-F5344CB8AC3E}">
+        <p14:creationId xmlns:p14="http://schemas.microsoft.com/office/powerpoint/2010/main" val="359106384"/>
+      </p:ext>
+    </p:extLst>
+  </p:cSld>
+  <p:clrMapOvr>
+    <a:masterClrMapping/>
+  </p:clrMapOvr>
+</p:sld>
+</file>
+
+<file path=ppt/slides/slide11.xml><?xml version="1.0" encoding="utf-8"?>
+<p:sld xmlns:a="http://schemas.openxmlformats.org/drawingml/2006/main" xmlns:r="http://schemas.openxmlformats.org/officeDocument/2006/relationships" xmlns:p="http://schemas.openxmlformats.org/presentationml/2006/main">
+  <p:cSld>
+    <p:spTree>
+      <p:nvGrpSpPr>
+        <p:cNvPr id="1" name="">
+          <a:extLst>
+            <a:ext uri="{FF2B5EF4-FFF2-40B4-BE49-F238E27FC236}">
+              <a16:creationId xmlns:a16="http://schemas.microsoft.com/office/drawing/2014/main" id="{15A786D9-E132-B7A3-D861-EDEBED711BA7}"/>
+            </a:ext>
+          </a:extLst>
+        </p:cNvPr>
+        <p:cNvGrpSpPr/>
+        <p:nvPr/>
+      </p:nvGrpSpPr>
+      <p:grpSpPr>
+        <a:xfrm>
+          <a:off x="0" y="0"/>
+          <a:ext cx="0" cy="0"/>
+          <a:chOff x="0" y="0"/>
+          <a:chExt cx="0" cy="0"/>
+        </a:xfrm>
+      </p:grpSpPr>
+      <p:sp>
+        <p:nvSpPr>
+          <p:cNvPr id="5" name="內容版面配置區 4">
+            <a:extLst>
+              <a:ext uri="{FF2B5EF4-FFF2-40B4-BE49-F238E27FC236}">
+                <a16:creationId xmlns:a16="http://schemas.microsoft.com/office/drawing/2014/main" id="{166A438E-18FA-CF4F-B623-B5C443122579}"/>
+              </a:ext>
+            </a:extLst>
+          </p:cNvPr>
           <p:cNvSpPr>
             <a:spLocks noGrp="1"/>
           </p:cNvSpPr>
@@ -3164,12 +3411,12 @@
         </p:nvSpPr>
         <p:spPr>
           <a:xfrm>
-            <a:off x="0" y="1600202"/>
-            <a:ext cx="12192000" cy="5257798"/>
+            <a:off x="0" y="2084851"/>
+            <a:ext cx="12192000" cy="2404863"/>
           </a:xfrm>
         </p:spPr>
         <p:txBody>
-          <a:bodyPr>
+          <a:bodyPr anchor="ctr">
             <a:normAutofit/>
           </a:bodyPr>
           <a:lstStyle/>
@@ -3178,135 +3425,438 @@
               <a:buNone/>
             </a:pPr>
             <a:r>
-              <a:rPr lang="zh-TW" altLang="en-US" sz="5400" b="1" dirty="0">
+              <a:rPr lang="zh-TW" altLang="en-US" sz="6400" b="1" dirty="0">
+                <a:solidFill>
+                  <a:srgbClr val="000066"/>
+                </a:solidFill>
+                <a:latin typeface="微軟正黑體" pitchFamily="34" charset="-120"/>
+                <a:ea typeface="微軟正黑體" pitchFamily="34" charset="-120"/>
+              </a:rPr>
+              <a:t>人海中雖顛沛流離</a:t>
+            </a:r>
+          </a:p>
+          <a:p>
+            <a:pPr algn="ctr">
+              <a:buNone/>
+            </a:pPr>
+            <a:r>
+              <a:rPr lang="zh-TW" altLang="en-US" sz="6400" b="1" dirty="0">
+                <a:solidFill>
+                  <a:srgbClr val="000066"/>
+                </a:solidFill>
+                <a:latin typeface="微軟正黑體" pitchFamily="34" charset="-120"/>
+                <a:ea typeface="微軟正黑體" pitchFamily="34" charset="-120"/>
+              </a:rPr>
+              <a:t>但祢應許不捨不棄</a:t>
+            </a:r>
+          </a:p>
+        </p:txBody>
+      </p:sp>
+      <p:sp>
+        <p:nvSpPr>
+          <p:cNvPr id="3" name="TextBox 2">
+            <a:extLst>
+              <a:ext uri="{FF2B5EF4-FFF2-40B4-BE49-F238E27FC236}">
+                <a16:creationId xmlns:a16="http://schemas.microsoft.com/office/drawing/2014/main" id="{07A5C5AB-7AA7-1345-1667-399289129524}"/>
+              </a:ext>
+            </a:extLst>
+          </p:cNvPr>
+          <p:cNvSpPr txBox="1"/>
+          <p:nvPr/>
+        </p:nvSpPr>
+        <p:spPr>
+          <a:xfrm>
+            <a:off x="0" y="5157193"/>
+            <a:ext cx="12192000" cy="584775"/>
+          </a:xfrm>
+          <a:prstGeom prst="rect">
+            <a:avLst/>
+          </a:prstGeom>
+          <a:noFill/>
+        </p:spPr>
+        <p:txBody>
+          <a:bodyPr wrap="square" rtlCol="0">
+            <a:spAutoFit/>
+          </a:bodyPr>
+          <a:lstStyle/>
+          <a:p>
+            <a:pPr algn="ctr"/>
+            <a:r>
+              <a:rPr lang="en-US" sz="3200" b="1" dirty="0">
+                <a:solidFill>
+                  <a:srgbClr val="000066"/>
+                </a:solidFill>
                 <a:latin typeface="Microsoft JhengHei" panose="020B0604030504040204" pitchFamily="34" charset="-120"/>
                 <a:ea typeface="Microsoft JhengHei" panose="020B0604030504040204" pitchFamily="34" charset="-120"/>
               </a:rPr>
-              <a:t>願我的心讚頌我的主</a:t>
-            </a:r>
-          </a:p>
-          <a:p>
-            <a:pPr algn="ctr">
-              <a:buNone/>
-            </a:pPr>
-            <a:r>
-              <a:rPr lang="zh-TW" altLang="en-US" sz="5400" b="1" dirty="0">
+              <a:t>( </a:t>
+            </a:r>
+            <a:r>
+              <a:rPr lang="zh-CN" altLang="en-US" sz="3200" b="1" dirty="0">
+                <a:solidFill>
+                  <a:srgbClr val="000066"/>
+                </a:solidFill>
                 <a:latin typeface="Microsoft JhengHei" panose="020B0604030504040204" pitchFamily="34" charset="-120"/>
                 <a:ea typeface="Microsoft JhengHei" panose="020B0604030504040204" pitchFamily="34" charset="-120"/>
               </a:rPr>
-              <a:t>願唱出讚美感恩的話語</a:t>
-            </a:r>
-          </a:p>
-          <a:p>
-            <a:pPr algn="ctr">
-              <a:buNone/>
-            </a:pPr>
-            <a:r>
-              <a:rPr lang="zh-TW" altLang="en-US" sz="5400" b="1" dirty="0" smtClean="0">
+              <a:t>副歌</a:t>
+            </a:r>
+            <a:r>
+              <a:rPr lang="en-US" altLang="zh-CN" sz="3200" b="1" dirty="0">
+                <a:solidFill>
+                  <a:srgbClr val="000066"/>
+                </a:solidFill>
                 <a:latin typeface="Microsoft JhengHei" panose="020B0604030504040204" pitchFamily="34" charset="-120"/>
                 <a:ea typeface="Microsoft JhengHei" panose="020B0604030504040204" pitchFamily="34" charset="-120"/>
               </a:rPr>
-              <a:t>在</a:t>
-            </a:r>
-            <a:r>
-              <a:rPr lang="zh-CN" altLang="en-US" sz="5400" b="1" dirty="0" smtClean="0">
+              <a:t> 2</a:t>
+            </a:r>
+            <a:r>
+              <a:rPr lang="en-US" sz="3200" b="1" dirty="0">
+                <a:solidFill>
+                  <a:srgbClr val="000066"/>
+                </a:solidFill>
                 <a:latin typeface="Microsoft JhengHei" panose="020B0604030504040204" pitchFamily="34" charset="-120"/>
                 <a:ea typeface="Microsoft JhengHei" panose="020B0604030504040204" pitchFamily="34" charset="-120"/>
               </a:rPr>
-              <a:t>袮</a:t>
-            </a:r>
-            <a:r>
-              <a:rPr lang="zh-TW" altLang="en-US" sz="5400" b="1" dirty="0" smtClean="0">
+              <a:t> )</a:t>
+            </a:r>
+            <a:endParaRPr lang="vi-VN" sz="3200" b="1" dirty="0">
+              <a:solidFill>
+                <a:srgbClr val="000066"/>
+              </a:solidFill>
+              <a:ea typeface="Microsoft JhengHei" panose="020B0604030504040204" pitchFamily="34" charset="-120"/>
+            </a:endParaRPr>
+          </a:p>
+        </p:txBody>
+      </p:sp>
+    </p:spTree>
+    <p:extLst>
+      <p:ext uri="{BB962C8B-B14F-4D97-AF65-F5344CB8AC3E}">
+        <p14:creationId xmlns:p14="http://schemas.microsoft.com/office/powerpoint/2010/main" val="2730386428"/>
+      </p:ext>
+    </p:extLst>
+  </p:cSld>
+  <p:clrMapOvr>
+    <a:masterClrMapping/>
+  </p:clrMapOvr>
+</p:sld>
+</file>
+
+<file path=ppt/slides/slide12.xml><?xml version="1.0" encoding="utf-8"?>
+<p:sld xmlns:a="http://schemas.openxmlformats.org/drawingml/2006/main" xmlns:r="http://schemas.openxmlformats.org/officeDocument/2006/relationships" xmlns:p="http://schemas.openxmlformats.org/presentationml/2006/main">
+  <p:cSld>
+    <p:spTree>
+      <p:nvGrpSpPr>
+        <p:cNvPr id="1" name="">
+          <a:extLst>
+            <a:ext uri="{FF2B5EF4-FFF2-40B4-BE49-F238E27FC236}">
+              <a16:creationId xmlns:a16="http://schemas.microsoft.com/office/drawing/2014/main" id="{A34BC687-82F5-A412-3AA1-7905BF70246E}"/>
+            </a:ext>
+          </a:extLst>
+        </p:cNvPr>
+        <p:cNvGrpSpPr/>
+        <p:nvPr/>
+      </p:nvGrpSpPr>
+      <p:grpSpPr>
+        <a:xfrm>
+          <a:off x="0" y="0"/>
+          <a:ext cx="0" cy="0"/>
+          <a:chOff x="0" y="0"/>
+          <a:chExt cx="0" cy="0"/>
+        </a:xfrm>
+      </p:grpSpPr>
+      <p:sp>
+        <p:nvSpPr>
+          <p:cNvPr id="5" name="內容版面配置區 4">
+            <a:extLst>
+              <a:ext uri="{FF2B5EF4-FFF2-40B4-BE49-F238E27FC236}">
+                <a16:creationId xmlns:a16="http://schemas.microsoft.com/office/drawing/2014/main" id="{B2537D5A-8453-4FEE-F9E9-8922A8674567}"/>
+              </a:ext>
+            </a:extLst>
+          </p:cNvPr>
+          <p:cNvSpPr>
+            <a:spLocks noGrp="1"/>
+          </p:cNvSpPr>
+          <p:nvPr>
+            <p:ph idx="1"/>
+          </p:nvPr>
+        </p:nvSpPr>
+        <p:spPr>
+          <a:xfrm>
+            <a:off x="0" y="2084851"/>
+            <a:ext cx="12192000" cy="2404863"/>
+          </a:xfrm>
+        </p:spPr>
+        <p:txBody>
+          <a:bodyPr anchor="ctr">
+            <a:normAutofit/>
+          </a:bodyPr>
+          <a:lstStyle/>
+          <a:p>
+            <a:pPr algn="ctr">
+              <a:buNone/>
+            </a:pPr>
+            <a:r>
+              <a:rPr lang="zh-TW" altLang="en-US" sz="6400" b="1" dirty="0">
+                <a:solidFill>
+                  <a:srgbClr val="000066"/>
+                </a:solidFill>
+                <a:latin typeface="微軟正黑體" pitchFamily="34" charset="-120"/>
+                <a:ea typeface="微軟正黑體" pitchFamily="34" charset="-120"/>
+              </a:rPr>
+              <a:t>投靠祢是最好的福氣</a:t>
+            </a:r>
+          </a:p>
+        </p:txBody>
+      </p:sp>
+      <p:sp>
+        <p:nvSpPr>
+          <p:cNvPr id="3" name="TextBox 2">
+            <a:extLst>
+              <a:ext uri="{FF2B5EF4-FFF2-40B4-BE49-F238E27FC236}">
+                <a16:creationId xmlns:a16="http://schemas.microsoft.com/office/drawing/2014/main" id="{2228E19C-A4AE-F76E-C9F3-B5E979DC1E86}"/>
+              </a:ext>
+            </a:extLst>
+          </p:cNvPr>
+          <p:cNvSpPr txBox="1"/>
+          <p:nvPr/>
+        </p:nvSpPr>
+        <p:spPr>
+          <a:xfrm>
+            <a:off x="0" y="5157193"/>
+            <a:ext cx="12192000" cy="584775"/>
+          </a:xfrm>
+          <a:prstGeom prst="rect">
+            <a:avLst/>
+          </a:prstGeom>
+          <a:noFill/>
+        </p:spPr>
+        <p:txBody>
+          <a:bodyPr wrap="square" rtlCol="0">
+            <a:spAutoFit/>
+          </a:bodyPr>
+          <a:lstStyle/>
+          <a:p>
+            <a:pPr algn="ctr"/>
+            <a:r>
+              <a:rPr lang="en-US" sz="3200" b="1" dirty="0">
+                <a:solidFill>
+                  <a:srgbClr val="000066"/>
+                </a:solidFill>
                 <a:latin typeface="Microsoft JhengHei" panose="020B0604030504040204" pitchFamily="34" charset="-120"/>
                 <a:ea typeface="Microsoft JhengHei" panose="020B0604030504040204" pitchFamily="34" charset="-120"/>
               </a:rPr>
-              <a:t>恩</a:t>
-            </a:r>
-            <a:r>
-              <a:rPr lang="zh-TW" altLang="en-US" sz="5400" b="1" dirty="0">
+              <a:t>( </a:t>
+            </a:r>
+            <a:r>
+              <a:rPr lang="zh-CN" altLang="en-US" sz="3200" b="1" dirty="0">
+                <a:solidFill>
+                  <a:srgbClr val="000066"/>
+                </a:solidFill>
                 <a:latin typeface="Microsoft JhengHei" panose="020B0604030504040204" pitchFamily="34" charset="-120"/>
                 <a:ea typeface="Microsoft JhengHei" panose="020B0604030504040204" pitchFamily="34" charset="-120"/>
               </a:rPr>
-              <a:t>典中幾多的好處</a:t>
-            </a:r>
-          </a:p>
-          <a:p>
-            <a:pPr algn="ctr">
-              <a:buNone/>
-            </a:pPr>
-            <a:r>
-              <a:rPr lang="zh-TW" altLang="en-US" sz="5400" b="1" dirty="0">
+              <a:t>副歌</a:t>
+            </a:r>
+            <a:r>
+              <a:rPr lang="en-US" altLang="zh-CN" sz="3200" b="1" dirty="0">
+                <a:solidFill>
+                  <a:srgbClr val="000066"/>
+                </a:solidFill>
                 <a:latin typeface="Microsoft JhengHei" panose="020B0604030504040204" pitchFamily="34" charset="-120"/>
                 <a:ea typeface="Microsoft JhengHei" panose="020B0604030504040204" pitchFamily="34" charset="-120"/>
               </a:rPr>
-              <a:t>清早到晚上也未停</a:t>
-            </a:r>
-            <a:r>
-              <a:rPr lang="zh-TW" altLang="en-US" sz="5400" b="1" dirty="0" smtClean="0">
+              <a:t> 2</a:t>
+            </a:r>
+            <a:r>
+              <a:rPr lang="en-US" sz="3200" b="1" dirty="0">
+                <a:solidFill>
+                  <a:srgbClr val="000066"/>
+                </a:solidFill>
                 <a:latin typeface="Microsoft JhengHei" panose="020B0604030504040204" pitchFamily="34" charset="-120"/>
                 <a:ea typeface="Microsoft JhengHei" panose="020B0604030504040204" pitchFamily="34" charset="-120"/>
               </a:rPr>
-              <a:t>住</a:t>
-            </a:r>
-            <a:endParaRPr lang="en-US" altLang="zh-TW" sz="5400" b="1" dirty="0" smtClean="0">
-              <a:latin typeface="Microsoft JhengHei" panose="020B0604030504040204" pitchFamily="34" charset="-120"/>
+              <a:t> )</a:t>
+            </a:r>
+            <a:endParaRPr lang="vi-VN" sz="3200" b="1" dirty="0">
+              <a:solidFill>
+                <a:srgbClr val="000066"/>
+              </a:solidFill>
               <a:ea typeface="Microsoft JhengHei" panose="020B0604030504040204" pitchFamily="34" charset="-120"/>
             </a:endParaRPr>
           </a:p>
+        </p:txBody>
+      </p:sp>
+    </p:spTree>
+    <p:extLst>
+      <p:ext uri="{BB962C8B-B14F-4D97-AF65-F5344CB8AC3E}">
+        <p14:creationId xmlns:p14="http://schemas.microsoft.com/office/powerpoint/2010/main" val="2708260204"/>
+      </p:ext>
+    </p:extLst>
+  </p:cSld>
+  <p:clrMapOvr>
+    <a:masterClrMapping/>
+  </p:clrMapOvr>
+</p:sld>
+</file>
+
+<file path=ppt/slides/slide13.xml><?xml version="1.0" encoding="utf-8"?>
+<p:sld xmlns:a="http://schemas.openxmlformats.org/drawingml/2006/main" xmlns:r="http://schemas.openxmlformats.org/officeDocument/2006/relationships" xmlns:p="http://schemas.openxmlformats.org/presentationml/2006/main">
+  <p:cSld>
+    <p:spTree>
+      <p:nvGrpSpPr>
+        <p:cNvPr id="1" name="">
+          <a:extLst>
+            <a:ext uri="{FF2B5EF4-FFF2-40B4-BE49-F238E27FC236}">
+              <a16:creationId xmlns:a16="http://schemas.microsoft.com/office/drawing/2014/main" id="{7761534C-AD2A-55CD-DBFF-4B3AD6EC2429}"/>
+            </a:ext>
+          </a:extLst>
+        </p:cNvPr>
+        <p:cNvGrpSpPr/>
+        <p:nvPr/>
+      </p:nvGrpSpPr>
+      <p:grpSpPr>
+        <a:xfrm>
+          <a:off x="0" y="0"/>
+          <a:ext cx="0" cy="0"/>
+          <a:chOff x="0" y="0"/>
+          <a:chExt cx="0" cy="0"/>
+        </a:xfrm>
+      </p:grpSpPr>
+      <p:sp>
+        <p:nvSpPr>
+          <p:cNvPr id="5" name="內容版面配置區 4">
+            <a:extLst>
+              <a:ext uri="{FF2B5EF4-FFF2-40B4-BE49-F238E27FC236}">
+                <a16:creationId xmlns:a16="http://schemas.microsoft.com/office/drawing/2014/main" id="{A8723C8A-F3C5-4A1B-EB30-7E96E2A9F727}"/>
+              </a:ext>
+            </a:extLst>
+          </p:cNvPr>
+          <p:cNvSpPr>
+            <a:spLocks noGrp="1"/>
+          </p:cNvSpPr>
+          <p:nvPr>
+            <p:ph idx="1"/>
+          </p:nvPr>
+        </p:nvSpPr>
+        <p:spPr>
+          <a:xfrm>
+            <a:off x="0" y="2084851"/>
+            <a:ext cx="12192000" cy="2404863"/>
+          </a:xfrm>
+        </p:spPr>
+        <p:txBody>
+          <a:bodyPr anchor="ctr">
+            <a:normAutofit/>
+          </a:bodyPr>
+          <a:lstStyle/>
           <a:p>
             <a:pPr algn="ctr">
               <a:buNone/>
             </a:pPr>
             <a:r>
-              <a:rPr lang="zh-TW" altLang="en-US" sz="5400" b="1" dirty="0">
+              <a:rPr lang="zh-TW" altLang="en-US" sz="6400" b="1" dirty="0">
+                <a:solidFill>
+                  <a:srgbClr val="000066"/>
+                </a:solidFill>
+                <a:latin typeface="微軟正黑體" pitchFamily="34" charset="-120"/>
+                <a:ea typeface="微軟正黑體" pitchFamily="34" charset="-120"/>
+              </a:rPr>
+              <a:t>全賴有著祢</a:t>
+            </a:r>
+          </a:p>
+          <a:p>
+            <a:pPr algn="ctr">
+              <a:buNone/>
+            </a:pPr>
+            <a:r>
+              <a:rPr lang="zh-TW" altLang="en-US" sz="6400" b="1" dirty="0">
+                <a:solidFill>
+                  <a:srgbClr val="000066"/>
+                </a:solidFill>
+                <a:latin typeface="微軟正黑體" pitchFamily="34" charset="-120"/>
+                <a:ea typeface="微軟正黑體" pitchFamily="34" charset="-120"/>
+              </a:rPr>
+              <a:t>才令這生極美</a:t>
+            </a:r>
+          </a:p>
+        </p:txBody>
+      </p:sp>
+      <p:sp>
+        <p:nvSpPr>
+          <p:cNvPr id="3" name="TextBox 2">
+            <a:extLst>
+              <a:ext uri="{FF2B5EF4-FFF2-40B4-BE49-F238E27FC236}">
+                <a16:creationId xmlns:a16="http://schemas.microsoft.com/office/drawing/2014/main" id="{7E051B93-E1C6-C372-8D89-1CED4E6C8506}"/>
+              </a:ext>
+            </a:extLst>
+          </p:cNvPr>
+          <p:cNvSpPr txBox="1"/>
+          <p:nvPr/>
+        </p:nvSpPr>
+        <p:spPr>
+          <a:xfrm>
+            <a:off x="0" y="5157193"/>
+            <a:ext cx="12192000" cy="584775"/>
+          </a:xfrm>
+          <a:prstGeom prst="rect">
+            <a:avLst/>
+          </a:prstGeom>
+          <a:noFill/>
+        </p:spPr>
+        <p:txBody>
+          <a:bodyPr wrap="square" rtlCol="0">
+            <a:spAutoFit/>
+          </a:bodyPr>
+          <a:lstStyle/>
+          <a:p>
+            <a:pPr algn="ctr"/>
+            <a:r>
+              <a:rPr lang="en-US" sz="3200" b="1" dirty="0">
+                <a:solidFill>
+                  <a:srgbClr val="000066"/>
+                </a:solidFill>
                 <a:latin typeface="Microsoft JhengHei" panose="020B0604030504040204" pitchFamily="34" charset="-120"/>
                 <a:ea typeface="Microsoft JhengHei" panose="020B0604030504040204" pitchFamily="34" charset="-120"/>
               </a:rPr>
-              <a:t>藏在</a:t>
-            </a:r>
-            <a:r>
-              <a:rPr lang="zh-CN" altLang="en-US" sz="5400" b="1" dirty="0">
+              <a:t>( </a:t>
+            </a:r>
+            <a:r>
+              <a:rPr lang="zh-CN" altLang="en-US" sz="3200" b="1" dirty="0">
+                <a:solidFill>
+                  <a:srgbClr val="000066"/>
+                </a:solidFill>
                 <a:latin typeface="Microsoft JhengHei" panose="020B0604030504040204" pitchFamily="34" charset="-120"/>
                 <a:ea typeface="Microsoft JhengHei" panose="020B0604030504040204" pitchFamily="34" charset="-120"/>
               </a:rPr>
-              <a:t>袮</a:t>
-            </a:r>
-            <a:r>
-              <a:rPr lang="zh-TW" altLang="en-US" sz="5400" b="1" dirty="0">
+              <a:t>結尾</a:t>
+            </a:r>
+            <a:r>
+              <a:rPr lang="en-US" sz="3200" b="1" dirty="0">
+                <a:solidFill>
+                  <a:srgbClr val="000066"/>
+                </a:solidFill>
                 <a:latin typeface="Microsoft JhengHei" panose="020B0604030504040204" pitchFamily="34" charset="-120"/>
                 <a:ea typeface="Microsoft JhengHei" panose="020B0604030504040204" pitchFamily="34" charset="-120"/>
               </a:rPr>
-              <a:t>帳幕的隱密</a:t>
-            </a:r>
-            <a:r>
-              <a:rPr lang="zh-TW" altLang="en-US" sz="5400" b="1" dirty="0" smtClean="0">
-                <a:latin typeface="Microsoft JhengHei" panose="020B0604030504040204" pitchFamily="34" charset="-120"/>
-                <a:ea typeface="Microsoft JhengHei" panose="020B0604030504040204" pitchFamily="34" charset="-120"/>
-              </a:rPr>
-              <a:t>處 渴</a:t>
-            </a:r>
-            <a:r>
-              <a:rPr lang="zh-TW" altLang="en-US" sz="5400" b="1" dirty="0">
-                <a:latin typeface="Microsoft JhengHei" panose="020B0604030504040204" pitchFamily="34" charset="-120"/>
-                <a:ea typeface="Microsoft JhengHei" panose="020B0604030504040204" pitchFamily="34" charset="-120"/>
-              </a:rPr>
-              <a:t>想一心盡力愛</a:t>
-            </a:r>
-            <a:r>
-              <a:rPr lang="zh-TW" altLang="en-US" sz="5400" b="1" dirty="0" smtClean="0">
-                <a:latin typeface="Microsoft JhengHei" panose="020B0604030504040204" pitchFamily="34" charset="-120"/>
-                <a:ea typeface="Microsoft JhengHei" panose="020B0604030504040204" pitchFamily="34" charset="-120"/>
-              </a:rPr>
-              <a:t>主</a:t>
-            </a:r>
-            <a:endParaRPr lang="zh-TW" altLang="en-US" sz="5400" b="1" dirty="0">
-              <a:latin typeface="Microsoft JhengHei" panose="020B0604030504040204" pitchFamily="34" charset="-120"/>
+              <a:t> )</a:t>
+            </a:r>
+            <a:endParaRPr lang="vi-VN" sz="3200" b="1" dirty="0">
+              <a:solidFill>
+                <a:srgbClr val="000066"/>
+              </a:solidFill>
               <a:ea typeface="Microsoft JhengHei" panose="020B0604030504040204" pitchFamily="34" charset="-120"/>
             </a:endParaRPr>
           </a:p>
         </p:txBody>
       </p:sp>
     </p:spTree>
+    <p:extLst>
+      <p:ext uri="{BB962C8B-B14F-4D97-AF65-F5344CB8AC3E}">
+        <p14:creationId xmlns:p14="http://schemas.microsoft.com/office/powerpoint/2010/main" val="38991709"/>
+      </p:ext>
+    </p:extLst>
   </p:cSld>
   <p:clrMapOvr>
     <a:masterClrMapping/>
@@ -3319,7 +3869,13 @@
   <p:cSld>
     <p:spTree>
       <p:nvGrpSpPr>
-        <p:cNvPr id="1" name=""/>
+        <p:cNvPr id="1" name="">
+          <a:extLst>
+            <a:ext uri="{FF2B5EF4-FFF2-40B4-BE49-F238E27FC236}">
+              <a16:creationId xmlns:a16="http://schemas.microsoft.com/office/drawing/2014/main" id="{499F6A04-361B-D03C-72FC-83746A3861FC}"/>
+            </a:ext>
+          </a:extLst>
+        </p:cNvPr>
         <p:cNvGrpSpPr/>
         <p:nvPr/>
       </p:nvGrpSpPr>
@@ -3333,119 +3889,137 @@
       </p:grpSpPr>
       <p:sp>
         <p:nvSpPr>
-          <p:cNvPr id="4" name="標題 3"/>
-          <p:cNvSpPr>
-            <a:spLocks noGrp="1"/>
-          </p:cNvSpPr>
-          <p:nvPr>
-            <p:ph type="title"/>
-          </p:nvPr>
-        </p:nvSpPr>
-        <p:spPr/>
-        <p:txBody>
-          <a:bodyPr>
+          <p:cNvPr id="5" name="內容版面配置區 4">
+            <a:extLst>
+              <a:ext uri="{FF2B5EF4-FFF2-40B4-BE49-F238E27FC236}">
+                <a16:creationId xmlns:a16="http://schemas.microsoft.com/office/drawing/2014/main" id="{EE77592B-EE8B-614D-4160-CDFC7BCE80DB}"/>
+              </a:ext>
+            </a:extLst>
+          </p:cNvPr>
+          <p:cNvSpPr>
+            <a:spLocks noGrp="1"/>
+          </p:cNvSpPr>
+          <p:nvPr>
+            <p:ph idx="1"/>
+          </p:nvPr>
+        </p:nvSpPr>
+        <p:spPr>
+          <a:xfrm>
+            <a:off x="0" y="2084851"/>
+            <a:ext cx="12192000" cy="2404863"/>
+          </a:xfrm>
+        </p:spPr>
+        <p:txBody>
+          <a:bodyPr anchor="ctr">
             <a:normAutofit/>
           </a:bodyPr>
           <a:lstStyle/>
           <a:p>
-            <a:r>
-              <a:rPr lang="zh-TW" altLang="en-US" sz="4800" b="1" dirty="0">
+            <a:pPr algn="ctr">
+              <a:buNone/>
+            </a:pPr>
+            <a:r>
+              <a:rPr lang="zh-TW" altLang="en-US" sz="6400" b="1" dirty="0">
+                <a:solidFill>
+                  <a:srgbClr val="000066"/>
+                </a:solidFill>
+                <a:latin typeface="微軟正黑體" pitchFamily="34" charset="-120"/>
+                <a:ea typeface="微軟正黑體" pitchFamily="34" charset="-120"/>
+              </a:rPr>
+              <a:t>願我的心讚頌我的主</a:t>
+            </a:r>
+          </a:p>
+          <a:p>
+            <a:pPr algn="ctr">
+              <a:buNone/>
+            </a:pPr>
+            <a:r>
+              <a:rPr lang="zh-TW" altLang="en-US" sz="6400" b="1" dirty="0">
+                <a:solidFill>
+                  <a:srgbClr val="000066"/>
+                </a:solidFill>
+                <a:latin typeface="微軟正黑體" pitchFamily="34" charset="-120"/>
+                <a:ea typeface="微軟正黑體" pitchFamily="34" charset="-120"/>
+              </a:rPr>
+              <a:t>願唱出讚美感恩的話語</a:t>
+            </a:r>
+          </a:p>
+        </p:txBody>
+      </p:sp>
+      <p:sp>
+        <p:nvSpPr>
+          <p:cNvPr id="3" name="TextBox 2">
+            <a:extLst>
+              <a:ext uri="{FF2B5EF4-FFF2-40B4-BE49-F238E27FC236}">
+                <a16:creationId xmlns:a16="http://schemas.microsoft.com/office/drawing/2014/main" id="{FA175DD0-F211-14DE-420F-4A50F79B6BD2}"/>
+              </a:ext>
+            </a:extLst>
+          </p:cNvPr>
+          <p:cNvSpPr txBox="1"/>
+          <p:nvPr/>
+        </p:nvSpPr>
+        <p:spPr>
+          <a:xfrm>
+            <a:off x="0" y="5157193"/>
+            <a:ext cx="12192000" cy="584775"/>
+          </a:xfrm>
+          <a:prstGeom prst="rect">
+            <a:avLst/>
+          </a:prstGeom>
+          <a:noFill/>
+        </p:spPr>
+        <p:txBody>
+          <a:bodyPr wrap="square" rtlCol="0">
+            <a:spAutoFit/>
+          </a:bodyPr>
+          <a:lstStyle/>
+          <a:p>
+            <a:pPr algn="ctr"/>
+            <a:r>
+              <a:rPr lang="en-US" sz="3200" b="1" dirty="0">
+                <a:solidFill>
+                  <a:srgbClr val="000066"/>
+                </a:solidFill>
                 <a:latin typeface="Microsoft JhengHei" panose="020B0604030504040204" pitchFamily="34" charset="-120"/>
                 <a:ea typeface="Microsoft JhengHei" panose="020B0604030504040204" pitchFamily="34" charset="-120"/>
               </a:rPr>
-              <a:t>最好的福氣</a:t>
-            </a:r>
-          </a:p>
-        </p:txBody>
-      </p:sp>
-      <p:sp>
-        <p:nvSpPr>
-          <p:cNvPr id="5" name="內容版面配置區 4"/>
-          <p:cNvSpPr>
-            <a:spLocks noGrp="1"/>
-          </p:cNvSpPr>
-          <p:nvPr>
-            <p:ph idx="1"/>
-          </p:nvPr>
-        </p:nvSpPr>
-        <p:spPr/>
-        <p:txBody>
-          <a:bodyPr>
-            <a:normAutofit/>
-          </a:bodyPr>
-          <a:lstStyle/>
-          <a:p>
-            <a:pPr algn="ctr">
-              <a:buNone/>
-            </a:pPr>
-            <a:r>
-              <a:rPr lang="zh-TW" altLang="en-US" sz="5400" b="1" dirty="0">
+              <a:t>( </a:t>
+            </a:r>
+            <a:r>
+              <a:rPr lang="zh-CN" altLang="en-US" sz="3200" b="1" dirty="0">
+                <a:solidFill>
+                  <a:srgbClr val="000066"/>
+                </a:solidFill>
                 <a:latin typeface="Microsoft JhengHei" panose="020B0604030504040204" pitchFamily="34" charset="-120"/>
                 <a:ea typeface="Microsoft JhengHei" panose="020B0604030504040204" pitchFamily="34" charset="-120"/>
               </a:rPr>
-              <a:t>也許一生多困苦</a:t>
-            </a:r>
-          </a:p>
-          <a:p>
-            <a:pPr algn="ctr">
-              <a:buNone/>
-            </a:pPr>
-            <a:r>
-              <a:rPr lang="zh-TW" altLang="en-US" sz="5400" b="1" dirty="0">
+              <a:t>正歌</a:t>
+            </a:r>
+            <a:r>
+              <a:rPr lang="en-US" sz="3200" b="1" dirty="0">
+                <a:solidFill>
+                  <a:srgbClr val="000066"/>
+                </a:solidFill>
                 <a:latin typeface="Microsoft JhengHei" panose="020B0604030504040204" pitchFamily="34" charset="-120"/>
                 <a:ea typeface="Microsoft JhengHei" panose="020B0604030504040204" pitchFamily="34" charset="-120"/>
               </a:rPr>
-              <a:t>被世間撇棄恨惡</a:t>
-            </a:r>
-          </a:p>
-          <a:p>
-            <a:pPr algn="ctr">
-              <a:buNone/>
-            </a:pPr>
-            <a:r>
-              <a:rPr lang="zh-TW" altLang="en-US" sz="5400" b="1" dirty="0" smtClean="0">
-                <a:latin typeface="Microsoft JhengHei" panose="020B0604030504040204" pitchFamily="34" charset="-120"/>
-                <a:ea typeface="Microsoft JhengHei" panose="020B0604030504040204" pitchFamily="34" charset="-120"/>
-              </a:rPr>
-              <a:t>但</a:t>
-            </a:r>
-            <a:r>
-              <a:rPr lang="zh-CN" altLang="en-US" sz="5400" b="1" dirty="0">
-                <a:latin typeface="Microsoft JhengHei" panose="020B0604030504040204" pitchFamily="34" charset="-120"/>
-                <a:ea typeface="Microsoft JhengHei" panose="020B0604030504040204" pitchFamily="34" charset="-120"/>
-              </a:rPr>
-              <a:t>袮</a:t>
-            </a:r>
-            <a:r>
-              <a:rPr lang="zh-TW" altLang="en-US" sz="5400" b="1" dirty="0" smtClean="0">
-                <a:latin typeface="Microsoft JhengHei" panose="020B0604030504040204" pitchFamily="34" charset="-120"/>
-                <a:ea typeface="Microsoft JhengHei" panose="020B0604030504040204" pitchFamily="34" charset="-120"/>
-              </a:rPr>
-              <a:t>總</a:t>
-            </a:r>
-            <a:r>
-              <a:rPr lang="zh-TW" altLang="en-US" sz="5400" b="1" dirty="0">
-                <a:latin typeface="Microsoft JhengHei" panose="020B0604030504040204" pitchFamily="34" charset="-120"/>
-                <a:ea typeface="Microsoft JhengHei" panose="020B0604030504040204" pitchFamily="34" charset="-120"/>
-              </a:rPr>
-              <a:t>看顧樂意攙扶</a:t>
-            </a:r>
-          </a:p>
-          <a:p>
-            <a:pPr algn="ctr">
-              <a:buNone/>
-            </a:pPr>
-            <a:r>
-              <a:rPr lang="zh-TW" altLang="en-US" sz="5400" b="1" dirty="0">
-                <a:latin typeface="Microsoft JhengHei" panose="020B0604030504040204" pitchFamily="34" charset="-120"/>
-                <a:ea typeface="Microsoft JhengHei" panose="020B0604030504040204" pitchFamily="34" charset="-120"/>
-              </a:rPr>
-              <a:t>愁悶慨嘆變作歡呼</a:t>
-            </a:r>
+              <a:t> )</a:t>
+            </a:r>
+            <a:endParaRPr lang="vi-VN" sz="3200" b="1" dirty="0">
+              <a:solidFill>
+                <a:srgbClr val="000066"/>
+              </a:solidFill>
+              <a:ea typeface="Microsoft JhengHei" panose="020B0604030504040204" pitchFamily="34" charset="-120"/>
+            </a:endParaRPr>
           </a:p>
         </p:txBody>
       </p:sp>
     </p:spTree>
+    <p:extLst>
+      <p:ext uri="{BB962C8B-B14F-4D97-AF65-F5344CB8AC3E}">
+        <p14:creationId xmlns:p14="http://schemas.microsoft.com/office/powerpoint/2010/main" val="3885075056"/>
+      </p:ext>
+    </p:extLst>
   </p:cSld>
   <p:clrMapOvr>
     <a:masterClrMapping/>
@@ -3458,7 +4032,13 @@
   <p:cSld>
     <p:spTree>
       <p:nvGrpSpPr>
-        <p:cNvPr id="1" name=""/>
+        <p:cNvPr id="1" name="">
+          <a:extLst>
+            <a:ext uri="{FF2B5EF4-FFF2-40B4-BE49-F238E27FC236}">
+              <a16:creationId xmlns:a16="http://schemas.microsoft.com/office/drawing/2014/main" id="{5B850755-2E1F-24D2-8C7C-D807E2D63BC2}"/>
+            </a:ext>
+          </a:extLst>
+        </p:cNvPr>
         <p:cNvGrpSpPr/>
         <p:nvPr/>
       </p:nvGrpSpPr>
@@ -3472,114 +4052,137 @@
       </p:grpSpPr>
       <p:sp>
         <p:nvSpPr>
-          <p:cNvPr id="4" name="標題 3"/>
-          <p:cNvSpPr>
-            <a:spLocks noGrp="1"/>
-          </p:cNvSpPr>
-          <p:nvPr>
-            <p:ph type="title"/>
-          </p:nvPr>
-        </p:nvSpPr>
-        <p:spPr/>
-        <p:txBody>
-          <a:bodyPr>
+          <p:cNvPr id="5" name="內容版面配置區 4">
+            <a:extLst>
+              <a:ext uri="{FF2B5EF4-FFF2-40B4-BE49-F238E27FC236}">
+                <a16:creationId xmlns:a16="http://schemas.microsoft.com/office/drawing/2014/main" id="{61BDFFD2-9992-BC01-8B44-DAC2FCFF70B8}"/>
+              </a:ext>
+            </a:extLst>
+          </p:cNvPr>
+          <p:cNvSpPr>
+            <a:spLocks noGrp="1"/>
+          </p:cNvSpPr>
+          <p:nvPr>
+            <p:ph idx="1"/>
+          </p:nvPr>
+        </p:nvSpPr>
+        <p:spPr>
+          <a:xfrm>
+            <a:off x="0" y="2084851"/>
+            <a:ext cx="12192000" cy="2404863"/>
+          </a:xfrm>
+        </p:spPr>
+        <p:txBody>
+          <a:bodyPr anchor="ctr">
             <a:normAutofit/>
           </a:bodyPr>
           <a:lstStyle/>
           <a:p>
-            <a:r>
-              <a:rPr lang="zh-TW" altLang="en-US" sz="4800" b="1" dirty="0">
+            <a:pPr algn="ctr">
+              <a:buNone/>
+            </a:pPr>
+            <a:r>
+              <a:rPr lang="zh-TW" altLang="en-US" sz="6400" b="1" dirty="0">
+                <a:solidFill>
+                  <a:srgbClr val="000066"/>
+                </a:solidFill>
+                <a:latin typeface="微軟正黑體" pitchFamily="34" charset="-120"/>
+                <a:ea typeface="微軟正黑體" pitchFamily="34" charset="-120"/>
+              </a:rPr>
+              <a:t>在祢恩典中幾多的好處</a:t>
+            </a:r>
+          </a:p>
+          <a:p>
+            <a:pPr algn="ctr">
+              <a:buNone/>
+            </a:pPr>
+            <a:r>
+              <a:rPr lang="zh-TW" altLang="en-US" sz="6400" b="1" dirty="0">
+                <a:solidFill>
+                  <a:srgbClr val="000066"/>
+                </a:solidFill>
+                <a:latin typeface="微軟正黑體" pitchFamily="34" charset="-120"/>
+                <a:ea typeface="微軟正黑體" pitchFamily="34" charset="-120"/>
+              </a:rPr>
+              <a:t>清早到晚上也未停住</a:t>
+            </a:r>
+          </a:p>
+        </p:txBody>
+      </p:sp>
+      <p:sp>
+        <p:nvSpPr>
+          <p:cNvPr id="3" name="TextBox 2">
+            <a:extLst>
+              <a:ext uri="{FF2B5EF4-FFF2-40B4-BE49-F238E27FC236}">
+                <a16:creationId xmlns:a16="http://schemas.microsoft.com/office/drawing/2014/main" id="{87847FF7-9CBA-BC0C-6406-7EAA1138B2F2}"/>
+              </a:ext>
+            </a:extLst>
+          </p:cNvPr>
+          <p:cNvSpPr txBox="1"/>
+          <p:nvPr/>
+        </p:nvSpPr>
+        <p:spPr>
+          <a:xfrm>
+            <a:off x="0" y="5157193"/>
+            <a:ext cx="12192000" cy="584775"/>
+          </a:xfrm>
+          <a:prstGeom prst="rect">
+            <a:avLst/>
+          </a:prstGeom>
+          <a:noFill/>
+        </p:spPr>
+        <p:txBody>
+          <a:bodyPr wrap="square" rtlCol="0">
+            <a:spAutoFit/>
+          </a:bodyPr>
+          <a:lstStyle/>
+          <a:p>
+            <a:pPr algn="ctr"/>
+            <a:r>
+              <a:rPr lang="en-US" sz="3200" b="1" dirty="0">
+                <a:solidFill>
+                  <a:srgbClr val="000066"/>
+                </a:solidFill>
                 <a:latin typeface="Microsoft JhengHei" panose="020B0604030504040204" pitchFamily="34" charset="-120"/>
                 <a:ea typeface="Microsoft JhengHei" panose="020B0604030504040204" pitchFamily="34" charset="-120"/>
               </a:rPr>
-              <a:t>最好的福氣</a:t>
-            </a:r>
-          </a:p>
-        </p:txBody>
-      </p:sp>
-      <p:sp>
-        <p:nvSpPr>
-          <p:cNvPr id="5" name="內容版面配置區 4"/>
-          <p:cNvSpPr>
-            <a:spLocks noGrp="1"/>
-          </p:cNvSpPr>
-          <p:nvPr>
-            <p:ph idx="1"/>
-          </p:nvPr>
-        </p:nvSpPr>
-        <p:spPr/>
-        <p:txBody>
-          <a:bodyPr>
-            <a:normAutofit/>
-          </a:bodyPr>
-          <a:lstStyle/>
-          <a:p>
-            <a:pPr algn="ctr">
-              <a:buNone/>
-            </a:pPr>
-            <a:r>
-              <a:rPr lang="zh-TW" altLang="en-US" sz="5400" b="1" dirty="0">
+              <a:t>( </a:t>
+            </a:r>
+            <a:r>
+              <a:rPr lang="zh-CN" altLang="en-US" sz="3200" b="1" dirty="0">
+                <a:solidFill>
+                  <a:srgbClr val="000066"/>
+                </a:solidFill>
                 <a:latin typeface="Microsoft JhengHei" panose="020B0604030504040204" pitchFamily="34" charset="-120"/>
                 <a:ea typeface="Microsoft JhengHei" panose="020B0604030504040204" pitchFamily="34" charset="-120"/>
               </a:rPr>
-              <a:t>人海中多昏暗迷糊</a:t>
-            </a:r>
-          </a:p>
-          <a:p>
-            <a:pPr algn="ctr">
-              <a:buNone/>
-            </a:pPr>
-            <a:r>
-              <a:rPr lang="zh-TW" altLang="en-US" sz="5400" b="1" dirty="0">
+              <a:t>正歌</a:t>
+            </a:r>
+            <a:r>
+              <a:rPr lang="en-US" sz="3200" b="1" dirty="0">
+                <a:solidFill>
+                  <a:srgbClr val="000066"/>
+                </a:solidFill>
                 <a:latin typeface="Microsoft JhengHei" panose="020B0604030504040204" pitchFamily="34" charset="-120"/>
                 <a:ea typeface="Microsoft JhengHei" panose="020B0604030504040204" pitchFamily="34" charset="-120"/>
               </a:rPr>
-              <a:t>但我的心始終堅固</a:t>
-            </a:r>
-          </a:p>
-          <a:p>
-            <a:pPr algn="ctr">
-              <a:buNone/>
-            </a:pPr>
-            <a:r>
-              <a:rPr lang="zh-TW" altLang="en-US" sz="5400" b="1" dirty="0">
-                <a:latin typeface="Microsoft JhengHei" panose="020B0604030504040204" pitchFamily="34" charset="-120"/>
-                <a:ea typeface="Microsoft JhengHei" panose="020B0604030504040204" pitchFamily="34" charset="-120"/>
-              </a:rPr>
-              <a:t>投</a:t>
-            </a:r>
-            <a:r>
-              <a:rPr lang="zh-TW" altLang="en-US" sz="5400" b="1" dirty="0" smtClean="0">
-                <a:latin typeface="Microsoft JhengHei" panose="020B0604030504040204" pitchFamily="34" charset="-120"/>
-                <a:ea typeface="Microsoft JhengHei" panose="020B0604030504040204" pitchFamily="34" charset="-120"/>
-              </a:rPr>
-              <a:t>靠</a:t>
-            </a:r>
-            <a:r>
-              <a:rPr lang="zh-CN" altLang="en-US" sz="5400" b="1" dirty="0">
-                <a:latin typeface="Microsoft JhengHei" panose="020B0604030504040204" pitchFamily="34" charset="-120"/>
-                <a:ea typeface="Microsoft JhengHei" panose="020B0604030504040204" pitchFamily="34" charset="-120"/>
-              </a:rPr>
-              <a:t>袮</a:t>
-            </a:r>
-            <a:r>
-              <a:rPr lang="zh-TW" altLang="en-US" sz="5400" b="1" dirty="0" smtClean="0">
-                <a:latin typeface="Microsoft JhengHei" panose="020B0604030504040204" pitchFamily="34" charset="-120"/>
-                <a:ea typeface="Microsoft JhengHei" panose="020B0604030504040204" pitchFamily="34" charset="-120"/>
-              </a:rPr>
-              <a:t>便</a:t>
-            </a:r>
-            <a:r>
-              <a:rPr lang="zh-TW" altLang="en-US" sz="5400" b="1" dirty="0">
-                <a:latin typeface="Microsoft JhengHei" panose="020B0604030504040204" pitchFamily="34" charset="-120"/>
-                <a:ea typeface="Microsoft JhengHei" panose="020B0604030504040204" pitchFamily="34" charset="-120"/>
-              </a:rPr>
-              <a:t>覺恩典豐富</a:t>
-            </a:r>
+              <a:t> )</a:t>
+            </a:r>
+            <a:endParaRPr lang="vi-VN" sz="3200" b="1" dirty="0">
+              <a:solidFill>
+                <a:srgbClr val="000066"/>
+              </a:solidFill>
+              <a:ea typeface="Microsoft JhengHei" panose="020B0604030504040204" pitchFamily="34" charset="-120"/>
+            </a:endParaRPr>
           </a:p>
         </p:txBody>
       </p:sp>
     </p:spTree>
+    <p:extLst>
+      <p:ext uri="{BB962C8B-B14F-4D97-AF65-F5344CB8AC3E}">
+        <p14:creationId xmlns:p14="http://schemas.microsoft.com/office/powerpoint/2010/main" val="151202537"/>
+      </p:ext>
+    </p:extLst>
   </p:cSld>
   <p:clrMapOvr>
     <a:masterClrMapping/>
@@ -3592,7 +4195,13 @@
   <p:cSld>
     <p:spTree>
       <p:nvGrpSpPr>
-        <p:cNvPr id="1" name=""/>
+        <p:cNvPr id="1" name="">
+          <a:extLst>
+            <a:ext uri="{FF2B5EF4-FFF2-40B4-BE49-F238E27FC236}">
+              <a16:creationId xmlns:a16="http://schemas.microsoft.com/office/drawing/2014/main" id="{A831FF67-7C87-9A4A-EBAF-80F57C759E91}"/>
+            </a:ext>
+          </a:extLst>
+        </p:cNvPr>
         <p:cNvGrpSpPr/>
         <p:nvPr/>
       </p:nvGrpSpPr>
@@ -3606,126 +4215,144 @@
       </p:grpSpPr>
       <p:sp>
         <p:nvSpPr>
-          <p:cNvPr id="4" name="標題 3"/>
-          <p:cNvSpPr>
-            <a:spLocks noGrp="1"/>
-          </p:cNvSpPr>
-          <p:nvPr>
-            <p:ph type="title"/>
-          </p:nvPr>
-        </p:nvSpPr>
-        <p:spPr/>
-        <p:txBody>
-          <a:bodyPr>
+          <p:cNvPr id="5" name="內容版面配置區 4">
+            <a:extLst>
+              <a:ext uri="{FF2B5EF4-FFF2-40B4-BE49-F238E27FC236}">
+                <a16:creationId xmlns:a16="http://schemas.microsoft.com/office/drawing/2014/main" id="{8B403272-E6D6-CBC0-71D0-B9F16B9BE755}"/>
+              </a:ext>
+            </a:extLst>
+          </p:cNvPr>
+          <p:cNvSpPr>
+            <a:spLocks noGrp="1"/>
+          </p:cNvSpPr>
+          <p:nvPr>
+            <p:ph idx="1"/>
+          </p:nvPr>
+        </p:nvSpPr>
+        <p:spPr>
+          <a:xfrm>
+            <a:off x="0" y="2084851"/>
+            <a:ext cx="12192000" cy="2404863"/>
+          </a:xfrm>
+        </p:spPr>
+        <p:txBody>
+          <a:bodyPr anchor="ctr">
             <a:normAutofit/>
           </a:bodyPr>
           <a:lstStyle/>
           <a:p>
-            <a:r>
-              <a:rPr lang="zh-TW" altLang="en-US" sz="4800" b="1" dirty="0">
+            <a:pPr algn="ctr">
+              <a:buNone/>
+            </a:pPr>
+            <a:r>
+              <a:rPr lang="zh-TW" altLang="en-US" sz="6400" b="1" dirty="0">
+                <a:solidFill>
+                  <a:srgbClr val="000066"/>
+                </a:solidFill>
+                <a:latin typeface="微軟正黑體" pitchFamily="34" charset="-120"/>
+                <a:ea typeface="微軟正黑體" pitchFamily="34" charset="-120"/>
+              </a:rPr>
+              <a:t>藏在祢帳幕的隱密處</a:t>
+            </a:r>
+            <a:endParaRPr lang="en-US" altLang="zh-TW" sz="6400" b="1" dirty="0">
+              <a:solidFill>
+                <a:srgbClr val="000066"/>
+              </a:solidFill>
+              <a:latin typeface="微軟正黑體" pitchFamily="34" charset="-120"/>
+              <a:ea typeface="微軟正黑體" pitchFamily="34" charset="-120"/>
+            </a:endParaRPr>
+          </a:p>
+          <a:p>
+            <a:pPr algn="ctr">
+              <a:buNone/>
+            </a:pPr>
+            <a:r>
+              <a:rPr lang="zh-TW" altLang="en-US" sz="6400" b="1" dirty="0">
+                <a:solidFill>
+                  <a:srgbClr val="000066"/>
+                </a:solidFill>
+                <a:latin typeface="微軟正黑體" pitchFamily="34" charset="-120"/>
+                <a:ea typeface="微軟正黑體" pitchFamily="34" charset="-120"/>
+              </a:rPr>
+              <a:t>渴想一心盡力愛主</a:t>
+            </a:r>
+          </a:p>
+        </p:txBody>
+      </p:sp>
+      <p:sp>
+        <p:nvSpPr>
+          <p:cNvPr id="3" name="TextBox 2">
+            <a:extLst>
+              <a:ext uri="{FF2B5EF4-FFF2-40B4-BE49-F238E27FC236}">
+                <a16:creationId xmlns:a16="http://schemas.microsoft.com/office/drawing/2014/main" id="{99D3A969-059A-C97A-EBAA-09CB09CA1BE0}"/>
+              </a:ext>
+            </a:extLst>
+          </p:cNvPr>
+          <p:cNvSpPr txBox="1"/>
+          <p:nvPr/>
+        </p:nvSpPr>
+        <p:spPr>
+          <a:xfrm>
+            <a:off x="0" y="5157193"/>
+            <a:ext cx="12192000" cy="584775"/>
+          </a:xfrm>
+          <a:prstGeom prst="rect">
+            <a:avLst/>
+          </a:prstGeom>
+          <a:noFill/>
+        </p:spPr>
+        <p:txBody>
+          <a:bodyPr wrap="square" rtlCol="0">
+            <a:spAutoFit/>
+          </a:bodyPr>
+          <a:lstStyle/>
+          <a:p>
+            <a:pPr algn="ctr"/>
+            <a:r>
+              <a:rPr lang="en-US" sz="3200" b="1" dirty="0">
+                <a:solidFill>
+                  <a:srgbClr val="000066"/>
+                </a:solidFill>
                 <a:latin typeface="Microsoft JhengHei" panose="020B0604030504040204" pitchFamily="34" charset="-120"/>
                 <a:ea typeface="Microsoft JhengHei" panose="020B0604030504040204" pitchFamily="34" charset="-120"/>
               </a:rPr>
-              <a:t>最好的福氣</a:t>
-            </a:r>
-          </a:p>
-        </p:txBody>
-      </p:sp>
-      <p:sp>
-        <p:nvSpPr>
-          <p:cNvPr id="5" name="內容版面配置區 4"/>
-          <p:cNvSpPr>
-            <a:spLocks noGrp="1"/>
-          </p:cNvSpPr>
-          <p:nvPr>
-            <p:ph idx="1"/>
-          </p:nvPr>
-        </p:nvSpPr>
-        <p:spPr/>
-        <p:txBody>
-          <a:bodyPr>
-            <a:normAutofit/>
-          </a:bodyPr>
-          <a:lstStyle/>
-          <a:p>
-            <a:pPr algn="ctr">
-              <a:buNone/>
-            </a:pPr>
-            <a:r>
-              <a:rPr lang="zh-TW" altLang="en-US" sz="5400" b="1" dirty="0">
+              <a:t>( </a:t>
+            </a:r>
+            <a:r>
+              <a:rPr lang="zh-CN" altLang="en-US" sz="3200" b="1" dirty="0">
+                <a:solidFill>
+                  <a:srgbClr val="000066"/>
+                </a:solidFill>
                 <a:latin typeface="Microsoft JhengHei" panose="020B0604030504040204" pitchFamily="34" charset="-120"/>
                 <a:ea typeface="Microsoft JhengHei" panose="020B0604030504040204" pitchFamily="34" charset="-120"/>
               </a:rPr>
-              <a:t>也許心中感痛悲</a:t>
-            </a:r>
-          </a:p>
-          <a:p>
-            <a:pPr algn="ctr">
-              <a:buNone/>
-            </a:pPr>
-            <a:r>
-              <a:rPr lang="zh-TW" altLang="en-US" sz="5400" b="1" dirty="0">
+              <a:t>正歌</a:t>
+            </a:r>
+            <a:r>
+              <a:rPr lang="en-US" sz="3200" b="1" dirty="0">
+                <a:solidFill>
+                  <a:srgbClr val="000066"/>
+                </a:solidFill>
                 <a:latin typeface="Microsoft JhengHei" panose="020B0604030504040204" pitchFamily="34" charset="-120"/>
                 <a:ea typeface="Microsoft JhengHei" panose="020B0604030504040204" pitchFamily="34" charset="-120"/>
               </a:rPr>
-              <a:t>甚至失去了力氣</a:t>
-            </a:r>
-          </a:p>
-          <a:p>
-            <a:pPr algn="ctr">
-              <a:buNone/>
-            </a:pPr>
-            <a:r>
-              <a:rPr lang="zh-TW" altLang="en-US" sz="5400" b="1" dirty="0">
-                <a:latin typeface="Microsoft JhengHei" panose="020B0604030504040204" pitchFamily="34" charset="-120"/>
-                <a:ea typeface="Microsoft JhengHei" panose="020B0604030504040204" pitchFamily="34" charset="-120"/>
-              </a:rPr>
-              <a:t>讓我抓</a:t>
-            </a:r>
-            <a:r>
-              <a:rPr lang="zh-TW" altLang="en-US" sz="5400" b="1" dirty="0" smtClean="0">
-                <a:latin typeface="Microsoft JhengHei" panose="020B0604030504040204" pitchFamily="34" charset="-120"/>
-                <a:ea typeface="Microsoft JhengHei" panose="020B0604030504040204" pitchFamily="34" charset="-120"/>
-              </a:rPr>
-              <a:t>緊</a:t>
-            </a:r>
-            <a:r>
-              <a:rPr lang="zh-CN" altLang="en-US" sz="5400" b="1" dirty="0">
-                <a:latin typeface="Microsoft JhengHei" panose="020B0604030504040204" pitchFamily="34" charset="-120"/>
-                <a:ea typeface="Microsoft JhengHei" panose="020B0604030504040204" pitchFamily="34" charset="-120"/>
-              </a:rPr>
-              <a:t>袮</a:t>
-            </a:r>
-            <a:r>
-              <a:rPr lang="zh-TW" altLang="en-US" sz="5400" b="1" dirty="0" smtClean="0">
-                <a:latin typeface="Microsoft JhengHei" panose="020B0604030504040204" pitchFamily="34" charset="-120"/>
-                <a:ea typeface="Microsoft JhengHei" panose="020B0604030504040204" pitchFamily="34" charset="-120"/>
-              </a:rPr>
-              <a:t>熱</a:t>
-            </a:r>
-            <a:r>
-              <a:rPr lang="zh-TW" altLang="en-US" sz="5400" b="1" dirty="0">
-                <a:latin typeface="Microsoft JhengHei" panose="020B0604030504040204" pitchFamily="34" charset="-120"/>
-                <a:ea typeface="Microsoft JhengHei" panose="020B0604030504040204" pitchFamily="34" charset="-120"/>
-              </a:rPr>
-              <a:t>暖的手臂</a:t>
-            </a:r>
-          </a:p>
-          <a:p>
-            <a:pPr algn="ctr">
-              <a:buNone/>
-            </a:pPr>
-            <a:r>
-              <a:rPr lang="zh-TW" altLang="en-US" sz="5400" b="1" dirty="0">
-                <a:latin typeface="Microsoft JhengHei" panose="020B0604030504040204" pitchFamily="34" charset="-120"/>
-                <a:ea typeface="Microsoft JhengHei" panose="020B0604030504040204" pitchFamily="34" charset="-120"/>
-              </a:rPr>
-              <a:t>攜著我再振翅高飛</a:t>
-            </a:r>
+              <a:t> )</a:t>
+            </a:r>
+            <a:endParaRPr lang="vi-VN" sz="3200" b="1" dirty="0">
+              <a:solidFill>
+                <a:srgbClr val="000066"/>
+              </a:solidFill>
+              <a:ea typeface="Microsoft JhengHei" panose="020B0604030504040204" pitchFamily="34" charset="-120"/>
+            </a:endParaRPr>
           </a:p>
         </p:txBody>
       </p:sp>
     </p:spTree>
+    <p:extLst>
+      <p:ext uri="{BB962C8B-B14F-4D97-AF65-F5344CB8AC3E}">
+        <p14:creationId xmlns:p14="http://schemas.microsoft.com/office/powerpoint/2010/main" val="222489792"/>
+      </p:ext>
+    </p:extLst>
   </p:cSld>
   <p:clrMapOvr>
     <a:masterClrMapping/>
@@ -3738,7 +4365,13 @@
   <p:cSld>
     <p:spTree>
       <p:nvGrpSpPr>
-        <p:cNvPr id="1" name=""/>
+        <p:cNvPr id="1" name="">
+          <a:extLst>
+            <a:ext uri="{FF2B5EF4-FFF2-40B4-BE49-F238E27FC236}">
+              <a16:creationId xmlns:a16="http://schemas.microsoft.com/office/drawing/2014/main" id="{12CA85EB-F7FF-7E98-E167-CC96C96B5CAC}"/>
+            </a:ext>
+          </a:extLst>
+        </p:cNvPr>
         <p:cNvGrpSpPr/>
         <p:nvPr/>
       </p:nvGrpSpPr>
@@ -3752,135 +4385,147 @@
       </p:grpSpPr>
       <p:sp>
         <p:nvSpPr>
-          <p:cNvPr id="4" name="標題 3"/>
-          <p:cNvSpPr>
-            <a:spLocks noGrp="1"/>
-          </p:cNvSpPr>
-          <p:nvPr>
-            <p:ph type="title"/>
-          </p:nvPr>
-        </p:nvSpPr>
-        <p:spPr/>
-        <p:txBody>
-          <a:bodyPr>
+          <p:cNvPr id="5" name="內容版面配置區 4">
+            <a:extLst>
+              <a:ext uri="{FF2B5EF4-FFF2-40B4-BE49-F238E27FC236}">
+                <a16:creationId xmlns:a16="http://schemas.microsoft.com/office/drawing/2014/main" id="{1C0125B7-A696-C284-B7A8-986EE5959AC8}"/>
+              </a:ext>
+            </a:extLst>
+          </p:cNvPr>
+          <p:cNvSpPr>
+            <a:spLocks noGrp="1"/>
+          </p:cNvSpPr>
+          <p:nvPr>
+            <p:ph idx="1"/>
+          </p:nvPr>
+        </p:nvSpPr>
+        <p:spPr>
+          <a:xfrm>
+            <a:off x="0" y="2084851"/>
+            <a:ext cx="12192000" cy="2404863"/>
+          </a:xfrm>
+        </p:spPr>
+        <p:txBody>
+          <a:bodyPr anchor="ctr">
             <a:normAutofit/>
           </a:bodyPr>
           <a:lstStyle/>
           <a:p>
-            <a:r>
-              <a:rPr lang="zh-TW" altLang="en-US" sz="4800" b="1" dirty="0">
+            <a:pPr algn="ctr">
+              <a:buNone/>
+            </a:pPr>
+            <a:r>
+              <a:rPr lang="zh-TW" altLang="en-US" sz="6400" b="1" dirty="0">
+                <a:solidFill>
+                  <a:srgbClr val="000066"/>
+                </a:solidFill>
+                <a:latin typeface="微軟正黑體" pitchFamily="34" charset="-120"/>
+                <a:ea typeface="微軟正黑體" pitchFamily="34" charset="-120"/>
+              </a:rPr>
+              <a:t>也許一生多困苦</a:t>
+            </a:r>
+          </a:p>
+          <a:p>
+            <a:pPr algn="ctr">
+              <a:buNone/>
+            </a:pPr>
+            <a:r>
+              <a:rPr lang="zh-TW" altLang="en-US" sz="6400" b="1" dirty="0">
+                <a:solidFill>
+                  <a:srgbClr val="000066"/>
+                </a:solidFill>
+                <a:latin typeface="微軟正黑體" pitchFamily="34" charset="-120"/>
+                <a:ea typeface="微軟正黑體" pitchFamily="34" charset="-120"/>
+              </a:rPr>
+              <a:t>被世間撇棄恨惡</a:t>
+            </a:r>
+          </a:p>
+        </p:txBody>
+      </p:sp>
+      <p:sp>
+        <p:nvSpPr>
+          <p:cNvPr id="3" name="TextBox 2">
+            <a:extLst>
+              <a:ext uri="{FF2B5EF4-FFF2-40B4-BE49-F238E27FC236}">
+                <a16:creationId xmlns:a16="http://schemas.microsoft.com/office/drawing/2014/main" id="{11B66AF4-2214-F1F6-C4D0-522DAE843ABB}"/>
+              </a:ext>
+            </a:extLst>
+          </p:cNvPr>
+          <p:cNvSpPr txBox="1"/>
+          <p:nvPr/>
+        </p:nvSpPr>
+        <p:spPr>
+          <a:xfrm>
+            <a:off x="0" y="5157193"/>
+            <a:ext cx="12192000" cy="584775"/>
+          </a:xfrm>
+          <a:prstGeom prst="rect">
+            <a:avLst/>
+          </a:prstGeom>
+          <a:noFill/>
+        </p:spPr>
+        <p:txBody>
+          <a:bodyPr wrap="square" rtlCol="0">
+            <a:spAutoFit/>
+          </a:bodyPr>
+          <a:lstStyle/>
+          <a:p>
+            <a:pPr algn="ctr"/>
+            <a:r>
+              <a:rPr lang="en-US" sz="3200" b="1" dirty="0">
+                <a:solidFill>
+                  <a:srgbClr val="000066"/>
+                </a:solidFill>
                 <a:latin typeface="Microsoft JhengHei" panose="020B0604030504040204" pitchFamily="34" charset="-120"/>
                 <a:ea typeface="Microsoft JhengHei" panose="020B0604030504040204" pitchFamily="34" charset="-120"/>
               </a:rPr>
-              <a:t>最好的福氣</a:t>
-            </a:r>
-          </a:p>
-        </p:txBody>
-      </p:sp>
-      <p:sp>
-        <p:nvSpPr>
-          <p:cNvPr id="5" name="內容版面配置區 4"/>
-          <p:cNvSpPr>
-            <a:spLocks noGrp="1"/>
-          </p:cNvSpPr>
-          <p:nvPr>
-            <p:ph idx="1"/>
-          </p:nvPr>
-        </p:nvSpPr>
-        <p:spPr/>
-        <p:txBody>
-          <a:bodyPr>
-            <a:normAutofit/>
-          </a:bodyPr>
-          <a:lstStyle/>
-          <a:p>
-            <a:pPr algn="ctr">
-              <a:buNone/>
-            </a:pPr>
-            <a:r>
-              <a:rPr lang="zh-TW" altLang="en-US" sz="5400" b="1" dirty="0">
+              <a:t>( </a:t>
+            </a:r>
+            <a:r>
+              <a:rPr lang="zh-CN" altLang="en-US" sz="3200" b="1" dirty="0">
+                <a:solidFill>
+                  <a:srgbClr val="000066"/>
+                </a:solidFill>
                 <a:latin typeface="Microsoft JhengHei" panose="020B0604030504040204" pitchFamily="34" charset="-120"/>
                 <a:ea typeface="Microsoft JhengHei" panose="020B0604030504040204" pitchFamily="34" charset="-120"/>
               </a:rPr>
-              <a:t>人海中雖顛沛流離</a:t>
-            </a:r>
-          </a:p>
-          <a:p>
-            <a:pPr algn="ctr">
-              <a:buNone/>
-            </a:pPr>
-            <a:r>
-              <a:rPr lang="zh-TW" altLang="en-US" sz="5400" b="1" dirty="0" smtClean="0">
+              <a:t>副歌</a:t>
+            </a:r>
+            <a:r>
+              <a:rPr lang="en-US" altLang="zh-CN" sz="3200" b="1" dirty="0">
+                <a:solidFill>
+                  <a:srgbClr val="000066"/>
+                </a:solidFill>
                 <a:latin typeface="Microsoft JhengHei" panose="020B0604030504040204" pitchFamily="34" charset="-120"/>
                 <a:ea typeface="Microsoft JhengHei" panose="020B0604030504040204" pitchFamily="34" charset="-120"/>
               </a:rPr>
-              <a:t>但</a:t>
-            </a:r>
-            <a:r>
-              <a:rPr lang="zh-CN" altLang="en-US" sz="5400" b="1" dirty="0">
+              <a:t> 1</a:t>
+            </a:r>
+            <a:r>
+              <a:rPr lang="en-US" sz="3200" b="1" dirty="0">
+                <a:solidFill>
+                  <a:srgbClr val="000066"/>
+                </a:solidFill>
                 <a:latin typeface="Microsoft JhengHei" panose="020B0604030504040204" pitchFamily="34" charset="-120"/>
                 <a:ea typeface="Microsoft JhengHei" panose="020B0604030504040204" pitchFamily="34" charset="-120"/>
               </a:rPr>
-              <a:t>袮</a:t>
-            </a:r>
-            <a:r>
-              <a:rPr lang="zh-TW" altLang="en-US" sz="5400" b="1" dirty="0" smtClean="0">
-                <a:latin typeface="Microsoft JhengHei" panose="020B0604030504040204" pitchFamily="34" charset="-120"/>
-                <a:ea typeface="Microsoft JhengHei" panose="020B0604030504040204" pitchFamily="34" charset="-120"/>
-              </a:rPr>
-              <a:t>應</a:t>
-            </a:r>
-            <a:r>
-              <a:rPr lang="zh-TW" altLang="en-US" sz="5400" b="1" dirty="0">
-                <a:latin typeface="Microsoft JhengHei" panose="020B0604030504040204" pitchFamily="34" charset="-120"/>
-                <a:ea typeface="Microsoft JhengHei" panose="020B0604030504040204" pitchFamily="34" charset="-120"/>
-              </a:rPr>
-              <a:t>許不捨不棄</a:t>
-            </a:r>
-          </a:p>
-          <a:p>
-            <a:pPr algn="ctr">
-              <a:buNone/>
-            </a:pPr>
-            <a:r>
-              <a:rPr lang="zh-TW" altLang="en-US" sz="5400" b="1" dirty="0">
-                <a:latin typeface="Microsoft JhengHei" panose="020B0604030504040204" pitchFamily="34" charset="-120"/>
-                <a:ea typeface="Microsoft JhengHei" panose="020B0604030504040204" pitchFamily="34" charset="-120"/>
-              </a:rPr>
-              <a:t>投</a:t>
-            </a:r>
-            <a:r>
-              <a:rPr lang="zh-TW" altLang="en-US" sz="5400" b="1" dirty="0" smtClean="0">
-                <a:latin typeface="Microsoft JhengHei" panose="020B0604030504040204" pitchFamily="34" charset="-120"/>
-                <a:ea typeface="Microsoft JhengHei" panose="020B0604030504040204" pitchFamily="34" charset="-120"/>
-              </a:rPr>
-              <a:t>靠</a:t>
-            </a:r>
-            <a:r>
-              <a:rPr lang="zh-CN" altLang="en-US" sz="5400" b="1" dirty="0">
-                <a:latin typeface="Microsoft JhengHei" panose="020B0604030504040204" pitchFamily="34" charset="-120"/>
-                <a:ea typeface="Microsoft JhengHei" panose="020B0604030504040204" pitchFamily="34" charset="-120"/>
-              </a:rPr>
-              <a:t>袮</a:t>
-            </a:r>
-            <a:r>
-              <a:rPr lang="zh-TW" altLang="en-US" sz="5400" b="1" dirty="0" smtClean="0">
-                <a:latin typeface="Microsoft JhengHei" panose="020B0604030504040204" pitchFamily="34" charset="-120"/>
-                <a:ea typeface="Microsoft JhengHei" panose="020B0604030504040204" pitchFamily="34" charset="-120"/>
-              </a:rPr>
-              <a:t>是</a:t>
-            </a:r>
-            <a:r>
-              <a:rPr lang="zh-TW" altLang="en-US" sz="5400" b="1" dirty="0">
-                <a:latin typeface="Microsoft JhengHei" panose="020B0604030504040204" pitchFamily="34" charset="-120"/>
-                <a:ea typeface="Microsoft JhengHei" panose="020B0604030504040204" pitchFamily="34" charset="-120"/>
-              </a:rPr>
-              <a:t>最好的福氣</a:t>
-            </a:r>
+              <a:t> )</a:t>
+            </a:r>
+            <a:endParaRPr lang="vi-VN" sz="3200" b="1" dirty="0">
+              <a:solidFill>
+                <a:srgbClr val="000066"/>
+              </a:solidFill>
+              <a:ea typeface="Microsoft JhengHei" panose="020B0604030504040204" pitchFamily="34" charset="-120"/>
+            </a:endParaRPr>
           </a:p>
         </p:txBody>
       </p:sp>
     </p:spTree>
+    <p:extLst>
+      <p:ext uri="{BB962C8B-B14F-4D97-AF65-F5344CB8AC3E}">
+        <p14:creationId xmlns:p14="http://schemas.microsoft.com/office/powerpoint/2010/main" val="1682163224"/>
+      </p:ext>
+    </p:extLst>
   </p:cSld>
   <p:clrMapOvr>
     <a:masterClrMapping/>
@@ -3893,7 +4538,13 @@
   <p:cSld>
     <p:spTree>
       <p:nvGrpSpPr>
-        <p:cNvPr id="1" name=""/>
+        <p:cNvPr id="1" name="">
+          <a:extLst>
+            <a:ext uri="{FF2B5EF4-FFF2-40B4-BE49-F238E27FC236}">
+              <a16:creationId xmlns:a16="http://schemas.microsoft.com/office/drawing/2014/main" id="{1D6523CB-8922-5787-CB6B-831FA4222D54}"/>
+            </a:ext>
+          </a:extLst>
+        </p:cNvPr>
         <p:cNvGrpSpPr/>
         <p:nvPr/>
       </p:nvGrpSpPr>
@@ -3907,34 +4558,186 @@
       </p:grpSpPr>
       <p:sp>
         <p:nvSpPr>
-          <p:cNvPr id="4" name="標題 3"/>
-          <p:cNvSpPr>
-            <a:spLocks noGrp="1"/>
-          </p:cNvSpPr>
-          <p:nvPr>
-            <p:ph type="title"/>
-          </p:nvPr>
-        </p:nvSpPr>
-        <p:spPr/>
-        <p:txBody>
-          <a:bodyPr>
+          <p:cNvPr id="5" name="內容版面配置區 4">
+            <a:extLst>
+              <a:ext uri="{FF2B5EF4-FFF2-40B4-BE49-F238E27FC236}">
+                <a16:creationId xmlns:a16="http://schemas.microsoft.com/office/drawing/2014/main" id="{8B0A9589-DA73-C834-5F3D-85EF6BB2603F}"/>
+              </a:ext>
+            </a:extLst>
+          </p:cNvPr>
+          <p:cNvSpPr>
+            <a:spLocks noGrp="1"/>
+          </p:cNvSpPr>
+          <p:nvPr>
+            <p:ph idx="1"/>
+          </p:nvPr>
+        </p:nvSpPr>
+        <p:spPr>
+          <a:xfrm>
+            <a:off x="0" y="2084851"/>
+            <a:ext cx="12192000" cy="2404863"/>
+          </a:xfrm>
+        </p:spPr>
+        <p:txBody>
+          <a:bodyPr anchor="ctr">
             <a:normAutofit/>
           </a:bodyPr>
           <a:lstStyle/>
           <a:p>
-            <a:r>
-              <a:rPr lang="zh-TW" altLang="en-US" sz="4800" b="1" dirty="0">
+            <a:pPr algn="ctr">
+              <a:buNone/>
+            </a:pPr>
+            <a:r>
+              <a:rPr lang="zh-TW" altLang="en-US" sz="6400" b="1" dirty="0">
+                <a:solidFill>
+                  <a:srgbClr val="000066"/>
+                </a:solidFill>
+                <a:latin typeface="微軟正黑體" pitchFamily="34" charset="-120"/>
+                <a:ea typeface="微軟正黑體" pitchFamily="34" charset="-120"/>
+              </a:rPr>
+              <a:t>但祢總看顧樂意攙扶</a:t>
+            </a:r>
+          </a:p>
+          <a:p>
+            <a:pPr algn="ctr">
+              <a:buNone/>
+            </a:pPr>
+            <a:r>
+              <a:rPr lang="zh-TW" altLang="en-US" sz="6400" b="1" dirty="0">
+                <a:solidFill>
+                  <a:srgbClr val="000066"/>
+                </a:solidFill>
+                <a:latin typeface="微軟正黑體" pitchFamily="34" charset="-120"/>
+                <a:ea typeface="微軟正黑體" pitchFamily="34" charset="-120"/>
+              </a:rPr>
+              <a:t>愁悶慨嘆變作歡呼</a:t>
+            </a:r>
+          </a:p>
+        </p:txBody>
+      </p:sp>
+      <p:sp>
+        <p:nvSpPr>
+          <p:cNvPr id="3" name="TextBox 2">
+            <a:extLst>
+              <a:ext uri="{FF2B5EF4-FFF2-40B4-BE49-F238E27FC236}">
+                <a16:creationId xmlns:a16="http://schemas.microsoft.com/office/drawing/2014/main" id="{1FFD5EFC-5840-4526-0EB8-6958A42A2AF2}"/>
+              </a:ext>
+            </a:extLst>
+          </p:cNvPr>
+          <p:cNvSpPr txBox="1"/>
+          <p:nvPr/>
+        </p:nvSpPr>
+        <p:spPr>
+          <a:xfrm>
+            <a:off x="0" y="5157193"/>
+            <a:ext cx="12192000" cy="584775"/>
+          </a:xfrm>
+          <a:prstGeom prst="rect">
+            <a:avLst/>
+          </a:prstGeom>
+          <a:noFill/>
+        </p:spPr>
+        <p:txBody>
+          <a:bodyPr wrap="square" rtlCol="0">
+            <a:spAutoFit/>
+          </a:bodyPr>
+          <a:lstStyle/>
+          <a:p>
+            <a:pPr algn="ctr"/>
+            <a:r>
+              <a:rPr lang="en-US" sz="3200" b="1" dirty="0">
+                <a:solidFill>
+                  <a:srgbClr val="000066"/>
+                </a:solidFill>
                 <a:latin typeface="Microsoft JhengHei" panose="020B0604030504040204" pitchFamily="34" charset="-120"/>
                 <a:ea typeface="Microsoft JhengHei" panose="020B0604030504040204" pitchFamily="34" charset="-120"/>
               </a:rPr>
-              <a:t>最好的福氣</a:t>
-            </a:r>
-          </a:p>
-        </p:txBody>
-      </p:sp>
-      <p:sp>
-        <p:nvSpPr>
-          <p:cNvPr id="5" name="內容版面配置區 4"/>
+              <a:t>( </a:t>
+            </a:r>
+            <a:r>
+              <a:rPr lang="zh-CN" altLang="en-US" sz="3200" b="1" dirty="0">
+                <a:solidFill>
+                  <a:srgbClr val="000066"/>
+                </a:solidFill>
+                <a:latin typeface="Microsoft JhengHei" panose="020B0604030504040204" pitchFamily="34" charset="-120"/>
+                <a:ea typeface="Microsoft JhengHei" panose="020B0604030504040204" pitchFamily="34" charset="-120"/>
+              </a:rPr>
+              <a:t>副歌</a:t>
+            </a:r>
+            <a:r>
+              <a:rPr lang="en-US" altLang="zh-CN" sz="3200" b="1" dirty="0">
+                <a:solidFill>
+                  <a:srgbClr val="000066"/>
+                </a:solidFill>
+                <a:latin typeface="Microsoft JhengHei" panose="020B0604030504040204" pitchFamily="34" charset="-120"/>
+                <a:ea typeface="Microsoft JhengHei" panose="020B0604030504040204" pitchFamily="34" charset="-120"/>
+              </a:rPr>
+              <a:t> 1</a:t>
+            </a:r>
+            <a:r>
+              <a:rPr lang="en-US" sz="3200" b="1" dirty="0">
+                <a:solidFill>
+                  <a:srgbClr val="000066"/>
+                </a:solidFill>
+                <a:latin typeface="Microsoft JhengHei" panose="020B0604030504040204" pitchFamily="34" charset="-120"/>
+                <a:ea typeface="Microsoft JhengHei" panose="020B0604030504040204" pitchFamily="34" charset="-120"/>
+              </a:rPr>
+              <a:t> )</a:t>
+            </a:r>
+            <a:endParaRPr lang="vi-VN" sz="3200" b="1" dirty="0">
+              <a:solidFill>
+                <a:srgbClr val="000066"/>
+              </a:solidFill>
+              <a:ea typeface="Microsoft JhengHei" panose="020B0604030504040204" pitchFamily="34" charset="-120"/>
+            </a:endParaRPr>
+          </a:p>
+        </p:txBody>
+      </p:sp>
+    </p:spTree>
+    <p:extLst>
+      <p:ext uri="{BB962C8B-B14F-4D97-AF65-F5344CB8AC3E}">
+        <p14:creationId xmlns:p14="http://schemas.microsoft.com/office/powerpoint/2010/main" val="3782534383"/>
+      </p:ext>
+    </p:extLst>
+  </p:cSld>
+  <p:clrMapOvr>
+    <a:masterClrMapping/>
+  </p:clrMapOvr>
+</p:sld>
+</file>
+
+<file path=ppt/slides/slide7.xml><?xml version="1.0" encoding="utf-8"?>
+<p:sld xmlns:a="http://schemas.openxmlformats.org/drawingml/2006/main" xmlns:r="http://schemas.openxmlformats.org/officeDocument/2006/relationships" xmlns:p="http://schemas.openxmlformats.org/presentationml/2006/main">
+  <p:cSld>
+    <p:spTree>
+      <p:nvGrpSpPr>
+        <p:cNvPr id="1" name="">
+          <a:extLst>
+            <a:ext uri="{FF2B5EF4-FFF2-40B4-BE49-F238E27FC236}">
+              <a16:creationId xmlns:a16="http://schemas.microsoft.com/office/drawing/2014/main" id="{CAF8DEF8-3F1F-365A-391F-B545F1BA6FA3}"/>
+            </a:ext>
+          </a:extLst>
+        </p:cNvPr>
+        <p:cNvGrpSpPr/>
+        <p:nvPr/>
+      </p:nvGrpSpPr>
+      <p:grpSpPr>
+        <a:xfrm>
+          <a:off x="0" y="0"/>
+          <a:ext cx="0" cy="0"/>
+          <a:chOff x="0" y="0"/>
+          <a:chExt cx="0" cy="0"/>
+        </a:xfrm>
+      </p:grpSpPr>
+      <p:sp>
+        <p:nvSpPr>
+          <p:cNvPr id="5" name="內容版面配置區 4">
+            <a:extLst>
+              <a:ext uri="{FF2B5EF4-FFF2-40B4-BE49-F238E27FC236}">
+                <a16:creationId xmlns:a16="http://schemas.microsoft.com/office/drawing/2014/main" id="{F4380219-982B-A08B-94BA-DAF2B088AD84}"/>
+              </a:ext>
+            </a:extLst>
+          </p:cNvPr>
           <p:cNvSpPr>
             <a:spLocks noGrp="1"/>
           </p:cNvSpPr>
@@ -3942,9 +4745,14 @@
             <p:ph idx="1"/>
           </p:nvPr>
         </p:nvSpPr>
-        <p:spPr/>
-        <p:txBody>
-          <a:bodyPr>
+        <p:spPr>
+          <a:xfrm>
+            <a:off x="0" y="2084851"/>
+            <a:ext cx="12192000" cy="2404863"/>
+          </a:xfrm>
+        </p:spPr>
+        <p:txBody>
+          <a:bodyPr anchor="ctr">
             <a:normAutofit/>
           </a:bodyPr>
           <a:lstStyle/>
@@ -3953,46 +4761,448 @@
               <a:buNone/>
             </a:pPr>
             <a:r>
-              <a:rPr lang="zh-TW" altLang="en-US" sz="5400" b="1" dirty="0">
+              <a:rPr lang="zh-TW" altLang="en-US" sz="6400" b="1" dirty="0">
+                <a:solidFill>
+                  <a:srgbClr val="000066"/>
+                </a:solidFill>
+                <a:latin typeface="微軟正黑體" pitchFamily="34" charset="-120"/>
+                <a:ea typeface="微軟正黑體" pitchFamily="34" charset="-120"/>
+              </a:rPr>
+              <a:t>人海中多昏暗迷糊</a:t>
+            </a:r>
+          </a:p>
+          <a:p>
+            <a:pPr algn="ctr">
+              <a:buNone/>
+            </a:pPr>
+            <a:r>
+              <a:rPr lang="zh-TW" altLang="en-US" sz="6400" b="1" dirty="0">
+                <a:solidFill>
+                  <a:srgbClr val="000066"/>
+                </a:solidFill>
+                <a:latin typeface="微軟正黑體" pitchFamily="34" charset="-120"/>
+                <a:ea typeface="微軟正黑體" pitchFamily="34" charset="-120"/>
+              </a:rPr>
+              <a:t>但我的心始終堅固</a:t>
+            </a:r>
+          </a:p>
+        </p:txBody>
+      </p:sp>
+      <p:sp>
+        <p:nvSpPr>
+          <p:cNvPr id="3" name="TextBox 2">
+            <a:extLst>
+              <a:ext uri="{FF2B5EF4-FFF2-40B4-BE49-F238E27FC236}">
+                <a16:creationId xmlns:a16="http://schemas.microsoft.com/office/drawing/2014/main" id="{9CEDE6C7-D825-14AB-BFE3-E112F2B6F6D6}"/>
+              </a:ext>
+            </a:extLst>
+          </p:cNvPr>
+          <p:cNvSpPr txBox="1"/>
+          <p:nvPr/>
+        </p:nvSpPr>
+        <p:spPr>
+          <a:xfrm>
+            <a:off x="0" y="5157193"/>
+            <a:ext cx="12192000" cy="584775"/>
+          </a:xfrm>
+          <a:prstGeom prst="rect">
+            <a:avLst/>
+          </a:prstGeom>
+          <a:noFill/>
+        </p:spPr>
+        <p:txBody>
+          <a:bodyPr wrap="square" rtlCol="0">
+            <a:spAutoFit/>
+          </a:bodyPr>
+          <a:lstStyle/>
+          <a:p>
+            <a:pPr algn="ctr"/>
+            <a:r>
+              <a:rPr lang="en-US" sz="3200" b="1" dirty="0">
+                <a:solidFill>
+                  <a:srgbClr val="000066"/>
+                </a:solidFill>
                 <a:latin typeface="Microsoft JhengHei" panose="020B0604030504040204" pitchFamily="34" charset="-120"/>
                 <a:ea typeface="Microsoft JhengHei" panose="020B0604030504040204" pitchFamily="34" charset="-120"/>
               </a:rPr>
-              <a:t>全賴有</a:t>
-            </a:r>
-            <a:r>
-              <a:rPr lang="zh-TW" altLang="en-US" sz="5400" b="1" dirty="0" smtClean="0">
+              <a:t>( </a:t>
+            </a:r>
+            <a:r>
+              <a:rPr lang="zh-CN" altLang="en-US" sz="3200" b="1" dirty="0">
+                <a:solidFill>
+                  <a:srgbClr val="000066"/>
+                </a:solidFill>
                 <a:latin typeface="Microsoft JhengHei" panose="020B0604030504040204" pitchFamily="34" charset="-120"/>
                 <a:ea typeface="Microsoft JhengHei" panose="020B0604030504040204" pitchFamily="34" charset="-120"/>
               </a:rPr>
-              <a:t>著</a:t>
-            </a:r>
-            <a:r>
-              <a:rPr lang="zh-CN" altLang="en-US" sz="5400" b="1" dirty="0">
+              <a:t>副歌</a:t>
+            </a:r>
+            <a:r>
+              <a:rPr lang="en-US" altLang="zh-CN" sz="3200" b="1" dirty="0">
+                <a:solidFill>
+                  <a:srgbClr val="000066"/>
+                </a:solidFill>
                 <a:latin typeface="Microsoft JhengHei" panose="020B0604030504040204" pitchFamily="34" charset="-120"/>
                 <a:ea typeface="Microsoft JhengHei" panose="020B0604030504040204" pitchFamily="34" charset="-120"/>
               </a:rPr>
-              <a:t>袮</a:t>
-            </a:r>
-            <a:endParaRPr lang="zh-TW" altLang="en-US" sz="5400" b="1" dirty="0">
-              <a:latin typeface="Microsoft JhengHei" panose="020B0604030504040204" pitchFamily="34" charset="-120"/>
+              <a:t> 1</a:t>
+            </a:r>
+            <a:r>
+              <a:rPr lang="en-US" sz="3200" b="1" dirty="0">
+                <a:solidFill>
+                  <a:srgbClr val="000066"/>
+                </a:solidFill>
+                <a:latin typeface="Microsoft JhengHei" panose="020B0604030504040204" pitchFamily="34" charset="-120"/>
+                <a:ea typeface="Microsoft JhengHei" panose="020B0604030504040204" pitchFamily="34" charset="-120"/>
+              </a:rPr>
+              <a:t> )</a:t>
+            </a:r>
+            <a:endParaRPr lang="vi-VN" sz="3200" b="1" dirty="0">
+              <a:solidFill>
+                <a:srgbClr val="000066"/>
+              </a:solidFill>
               <a:ea typeface="Microsoft JhengHei" panose="020B0604030504040204" pitchFamily="34" charset="-120"/>
             </a:endParaRPr>
           </a:p>
+        </p:txBody>
+      </p:sp>
+    </p:spTree>
+    <p:extLst>
+      <p:ext uri="{BB962C8B-B14F-4D97-AF65-F5344CB8AC3E}">
+        <p14:creationId xmlns:p14="http://schemas.microsoft.com/office/powerpoint/2010/main" val="1682161939"/>
+      </p:ext>
+    </p:extLst>
+  </p:cSld>
+  <p:clrMapOvr>
+    <a:masterClrMapping/>
+  </p:clrMapOvr>
+</p:sld>
+</file>
+
+<file path=ppt/slides/slide8.xml><?xml version="1.0" encoding="utf-8"?>
+<p:sld xmlns:a="http://schemas.openxmlformats.org/drawingml/2006/main" xmlns:r="http://schemas.openxmlformats.org/officeDocument/2006/relationships" xmlns:p="http://schemas.openxmlformats.org/presentationml/2006/main">
+  <p:cSld>
+    <p:spTree>
+      <p:nvGrpSpPr>
+        <p:cNvPr id="1" name="">
+          <a:extLst>
+            <a:ext uri="{FF2B5EF4-FFF2-40B4-BE49-F238E27FC236}">
+              <a16:creationId xmlns:a16="http://schemas.microsoft.com/office/drawing/2014/main" id="{F4E4A37D-F3BA-42AC-D6B5-FC0E0BDC092D}"/>
+            </a:ext>
+          </a:extLst>
+        </p:cNvPr>
+        <p:cNvGrpSpPr/>
+        <p:nvPr/>
+      </p:nvGrpSpPr>
+      <p:grpSpPr>
+        <a:xfrm>
+          <a:off x="0" y="0"/>
+          <a:ext cx="0" cy="0"/>
+          <a:chOff x="0" y="0"/>
+          <a:chExt cx="0" cy="0"/>
+        </a:xfrm>
+      </p:grpSpPr>
+      <p:sp>
+        <p:nvSpPr>
+          <p:cNvPr id="5" name="內容版面配置區 4">
+            <a:extLst>
+              <a:ext uri="{FF2B5EF4-FFF2-40B4-BE49-F238E27FC236}">
+                <a16:creationId xmlns:a16="http://schemas.microsoft.com/office/drawing/2014/main" id="{BE8D0D5C-0C46-F73E-AAC9-11CDE0C52741}"/>
+              </a:ext>
+            </a:extLst>
+          </p:cNvPr>
+          <p:cNvSpPr>
+            <a:spLocks noGrp="1"/>
+          </p:cNvSpPr>
+          <p:nvPr>
+            <p:ph idx="1"/>
+          </p:nvPr>
+        </p:nvSpPr>
+        <p:spPr>
+          <a:xfrm>
+            <a:off x="0" y="2084851"/>
+            <a:ext cx="12192000" cy="2404863"/>
+          </a:xfrm>
+        </p:spPr>
+        <p:txBody>
+          <a:bodyPr anchor="ctr">
+            <a:normAutofit/>
+          </a:bodyPr>
+          <a:lstStyle/>
           <a:p>
             <a:pPr algn="ctr">
               <a:buNone/>
             </a:pPr>
             <a:r>
-              <a:rPr lang="zh-TW" altLang="en-US" sz="5400" b="1" dirty="0">
+              <a:rPr lang="zh-TW" altLang="en-US" sz="6400" b="1" dirty="0">
+                <a:solidFill>
+                  <a:srgbClr val="000066"/>
+                </a:solidFill>
+                <a:latin typeface="微軟正黑體" pitchFamily="34" charset="-120"/>
+                <a:ea typeface="微軟正黑體" pitchFamily="34" charset="-120"/>
+              </a:rPr>
+              <a:t>投靠祢便覺恩典豐富</a:t>
+            </a:r>
+          </a:p>
+        </p:txBody>
+      </p:sp>
+      <p:sp>
+        <p:nvSpPr>
+          <p:cNvPr id="3" name="TextBox 2">
+            <a:extLst>
+              <a:ext uri="{FF2B5EF4-FFF2-40B4-BE49-F238E27FC236}">
+                <a16:creationId xmlns:a16="http://schemas.microsoft.com/office/drawing/2014/main" id="{EBB9BCA4-A522-C3F8-6D43-9D58EAB1B92F}"/>
+              </a:ext>
+            </a:extLst>
+          </p:cNvPr>
+          <p:cNvSpPr txBox="1"/>
+          <p:nvPr/>
+        </p:nvSpPr>
+        <p:spPr>
+          <a:xfrm>
+            <a:off x="0" y="5157193"/>
+            <a:ext cx="12192000" cy="584775"/>
+          </a:xfrm>
+          <a:prstGeom prst="rect">
+            <a:avLst/>
+          </a:prstGeom>
+          <a:noFill/>
+        </p:spPr>
+        <p:txBody>
+          <a:bodyPr wrap="square" rtlCol="0">
+            <a:spAutoFit/>
+          </a:bodyPr>
+          <a:lstStyle/>
+          <a:p>
+            <a:pPr algn="ctr"/>
+            <a:r>
+              <a:rPr lang="en-US" sz="3200" b="1" dirty="0">
+                <a:solidFill>
+                  <a:srgbClr val="000066"/>
+                </a:solidFill>
                 <a:latin typeface="Microsoft JhengHei" panose="020B0604030504040204" pitchFamily="34" charset="-120"/>
                 <a:ea typeface="Microsoft JhengHei" panose="020B0604030504040204" pitchFamily="34" charset="-120"/>
               </a:rPr>
-              <a:t>才令這生極美</a:t>
-            </a:r>
+              <a:t>( </a:t>
+            </a:r>
+            <a:r>
+              <a:rPr lang="zh-CN" altLang="en-US" sz="3200" b="1" dirty="0">
+                <a:solidFill>
+                  <a:srgbClr val="000066"/>
+                </a:solidFill>
+                <a:latin typeface="Microsoft JhengHei" panose="020B0604030504040204" pitchFamily="34" charset="-120"/>
+                <a:ea typeface="Microsoft JhengHei" panose="020B0604030504040204" pitchFamily="34" charset="-120"/>
+              </a:rPr>
+              <a:t>副歌</a:t>
+            </a:r>
+            <a:r>
+              <a:rPr lang="en-US" altLang="zh-CN" sz="3200" b="1" dirty="0">
+                <a:solidFill>
+                  <a:srgbClr val="000066"/>
+                </a:solidFill>
+                <a:latin typeface="Microsoft JhengHei" panose="020B0604030504040204" pitchFamily="34" charset="-120"/>
+                <a:ea typeface="Microsoft JhengHei" panose="020B0604030504040204" pitchFamily="34" charset="-120"/>
+              </a:rPr>
+              <a:t> 1</a:t>
+            </a:r>
+            <a:r>
+              <a:rPr lang="en-US" sz="3200" b="1" dirty="0">
+                <a:solidFill>
+                  <a:srgbClr val="000066"/>
+                </a:solidFill>
+                <a:latin typeface="Microsoft JhengHei" panose="020B0604030504040204" pitchFamily="34" charset="-120"/>
+                <a:ea typeface="Microsoft JhengHei" panose="020B0604030504040204" pitchFamily="34" charset="-120"/>
+              </a:rPr>
+              <a:t> )</a:t>
+            </a:r>
+            <a:endParaRPr lang="vi-VN" sz="3200" b="1" dirty="0">
+              <a:solidFill>
+                <a:srgbClr val="000066"/>
+              </a:solidFill>
+              <a:ea typeface="Microsoft JhengHei" panose="020B0604030504040204" pitchFamily="34" charset="-120"/>
+            </a:endParaRPr>
           </a:p>
         </p:txBody>
       </p:sp>
     </p:spTree>
+    <p:extLst>
+      <p:ext uri="{BB962C8B-B14F-4D97-AF65-F5344CB8AC3E}">
+        <p14:creationId xmlns:p14="http://schemas.microsoft.com/office/powerpoint/2010/main" val="1644342863"/>
+      </p:ext>
+    </p:extLst>
+  </p:cSld>
+  <p:clrMapOvr>
+    <a:masterClrMapping/>
+  </p:clrMapOvr>
+</p:sld>
+</file>
+
+<file path=ppt/slides/slide9.xml><?xml version="1.0" encoding="utf-8"?>
+<p:sld xmlns:a="http://schemas.openxmlformats.org/drawingml/2006/main" xmlns:r="http://schemas.openxmlformats.org/officeDocument/2006/relationships" xmlns:p="http://schemas.openxmlformats.org/presentationml/2006/main">
+  <p:cSld>
+    <p:spTree>
+      <p:nvGrpSpPr>
+        <p:cNvPr id="1" name="">
+          <a:extLst>
+            <a:ext uri="{FF2B5EF4-FFF2-40B4-BE49-F238E27FC236}">
+              <a16:creationId xmlns:a16="http://schemas.microsoft.com/office/drawing/2014/main" id="{C59F141E-1950-4644-5445-3F8BBF9CA0D9}"/>
+            </a:ext>
+          </a:extLst>
+        </p:cNvPr>
+        <p:cNvGrpSpPr/>
+        <p:nvPr/>
+      </p:nvGrpSpPr>
+      <p:grpSpPr>
+        <a:xfrm>
+          <a:off x="0" y="0"/>
+          <a:ext cx="0" cy="0"/>
+          <a:chOff x="0" y="0"/>
+          <a:chExt cx="0" cy="0"/>
+        </a:xfrm>
+      </p:grpSpPr>
+      <p:sp>
+        <p:nvSpPr>
+          <p:cNvPr id="5" name="內容版面配置區 4">
+            <a:extLst>
+              <a:ext uri="{FF2B5EF4-FFF2-40B4-BE49-F238E27FC236}">
+                <a16:creationId xmlns:a16="http://schemas.microsoft.com/office/drawing/2014/main" id="{1186CC8B-34A4-F734-8406-FBBCD61EB6BD}"/>
+              </a:ext>
+            </a:extLst>
+          </p:cNvPr>
+          <p:cNvSpPr>
+            <a:spLocks noGrp="1"/>
+          </p:cNvSpPr>
+          <p:nvPr>
+            <p:ph idx="1"/>
+          </p:nvPr>
+        </p:nvSpPr>
+        <p:spPr>
+          <a:xfrm>
+            <a:off x="0" y="2084851"/>
+            <a:ext cx="12192000" cy="2404863"/>
+          </a:xfrm>
+        </p:spPr>
+        <p:txBody>
+          <a:bodyPr anchor="ctr">
+            <a:normAutofit/>
+          </a:bodyPr>
+          <a:lstStyle/>
+          <a:p>
+            <a:pPr algn="ctr">
+              <a:buNone/>
+            </a:pPr>
+            <a:r>
+              <a:rPr lang="zh-TW" altLang="en-US" sz="6400" b="1" dirty="0">
+                <a:solidFill>
+                  <a:srgbClr val="000066"/>
+                </a:solidFill>
+                <a:latin typeface="微軟正黑體" pitchFamily="34" charset="-120"/>
+                <a:ea typeface="微軟正黑體" pitchFamily="34" charset="-120"/>
+              </a:rPr>
+              <a:t>也許心中感痛悲</a:t>
+            </a:r>
+          </a:p>
+          <a:p>
+            <a:pPr algn="ctr">
+              <a:buNone/>
+            </a:pPr>
+            <a:r>
+              <a:rPr lang="zh-TW" altLang="en-US" sz="6400" b="1" dirty="0">
+                <a:solidFill>
+                  <a:srgbClr val="000066"/>
+                </a:solidFill>
+                <a:latin typeface="微軟正黑體" pitchFamily="34" charset="-120"/>
+                <a:ea typeface="微軟正黑體" pitchFamily="34" charset="-120"/>
+              </a:rPr>
+              <a:t>甚至失去了力氣</a:t>
+            </a:r>
+          </a:p>
+        </p:txBody>
+      </p:sp>
+      <p:sp>
+        <p:nvSpPr>
+          <p:cNvPr id="3" name="TextBox 2">
+            <a:extLst>
+              <a:ext uri="{FF2B5EF4-FFF2-40B4-BE49-F238E27FC236}">
+                <a16:creationId xmlns:a16="http://schemas.microsoft.com/office/drawing/2014/main" id="{8EFA5069-444F-6BE2-F097-03FAE5B8901A}"/>
+              </a:ext>
+            </a:extLst>
+          </p:cNvPr>
+          <p:cNvSpPr txBox="1"/>
+          <p:nvPr/>
+        </p:nvSpPr>
+        <p:spPr>
+          <a:xfrm>
+            <a:off x="0" y="5157193"/>
+            <a:ext cx="12192000" cy="584775"/>
+          </a:xfrm>
+          <a:prstGeom prst="rect">
+            <a:avLst/>
+          </a:prstGeom>
+          <a:noFill/>
+        </p:spPr>
+        <p:txBody>
+          <a:bodyPr wrap="square" rtlCol="0">
+            <a:spAutoFit/>
+          </a:bodyPr>
+          <a:lstStyle/>
+          <a:p>
+            <a:pPr algn="ctr"/>
+            <a:r>
+              <a:rPr lang="en-US" sz="3200" b="1" dirty="0">
+                <a:solidFill>
+                  <a:srgbClr val="000066"/>
+                </a:solidFill>
+                <a:latin typeface="Microsoft JhengHei" panose="020B0604030504040204" pitchFamily="34" charset="-120"/>
+                <a:ea typeface="Microsoft JhengHei" panose="020B0604030504040204" pitchFamily="34" charset="-120"/>
+              </a:rPr>
+              <a:t>( </a:t>
+            </a:r>
+            <a:r>
+              <a:rPr lang="zh-CN" altLang="en-US" sz="3200" b="1" dirty="0">
+                <a:solidFill>
+                  <a:srgbClr val="000066"/>
+                </a:solidFill>
+                <a:latin typeface="Microsoft JhengHei" panose="020B0604030504040204" pitchFamily="34" charset="-120"/>
+                <a:ea typeface="Microsoft JhengHei" panose="020B0604030504040204" pitchFamily="34" charset="-120"/>
+              </a:rPr>
+              <a:t>副歌</a:t>
+            </a:r>
+            <a:r>
+              <a:rPr lang="en-US" altLang="zh-CN" sz="3200" b="1" dirty="0">
+                <a:solidFill>
+                  <a:srgbClr val="000066"/>
+                </a:solidFill>
+                <a:latin typeface="Microsoft JhengHei" panose="020B0604030504040204" pitchFamily="34" charset="-120"/>
+                <a:ea typeface="Microsoft JhengHei" panose="020B0604030504040204" pitchFamily="34" charset="-120"/>
+              </a:rPr>
+              <a:t> 2</a:t>
+            </a:r>
+            <a:r>
+              <a:rPr lang="en-US" sz="3200" b="1" dirty="0">
+                <a:solidFill>
+                  <a:srgbClr val="000066"/>
+                </a:solidFill>
+                <a:latin typeface="Microsoft JhengHei" panose="020B0604030504040204" pitchFamily="34" charset="-120"/>
+                <a:ea typeface="Microsoft JhengHei" panose="020B0604030504040204" pitchFamily="34" charset="-120"/>
+              </a:rPr>
+              <a:t> )</a:t>
+            </a:r>
+            <a:endParaRPr lang="vi-VN" sz="3200" b="1" dirty="0">
+              <a:solidFill>
+                <a:srgbClr val="000066"/>
+              </a:solidFill>
+              <a:ea typeface="Microsoft JhengHei" panose="020B0604030504040204" pitchFamily="34" charset="-120"/>
+            </a:endParaRPr>
+          </a:p>
+        </p:txBody>
+      </p:sp>
+    </p:spTree>
+    <p:extLst>
+      <p:ext uri="{BB962C8B-B14F-4D97-AF65-F5344CB8AC3E}">
+        <p14:creationId xmlns:p14="http://schemas.microsoft.com/office/powerpoint/2010/main" val="685484354"/>
+      </p:ext>
+    </p:extLst>
   </p:cSld>
   <p:clrMapOvr>
     <a:masterClrMapping/>
